--- a/PPT/Major_project_Presentation.pptx
+++ b/PPT/Major_project_Presentation.pptx
@@ -13,8 +13,13 @@
     <p:sldId id="258" r:id="rId7"/>
     <p:sldId id="268" r:id="rId8"/>
     <p:sldId id="261" r:id="rId9"/>
-    <p:sldId id="269" r:id="rId10"/>
-    <p:sldId id="263" r:id="rId11"/>
+    <p:sldId id="271" r:id="rId10"/>
+    <p:sldId id="270" r:id="rId11"/>
+    <p:sldId id="272" r:id="rId12"/>
+    <p:sldId id="273" r:id="rId13"/>
+    <p:sldId id="274" r:id="rId14"/>
+    <p:sldId id="269" r:id="rId15"/>
+    <p:sldId id="263" r:id="rId16"/>
   </p:sldIdLst>
   <p:sldSz cx="12192000" cy="6858000"/>
   <p:notesSz cx="6858000" cy="9144000"/>
@@ -866,7 +871,7 @@
           <a:p>
             <a:fld id="{F5D1029C-D7E1-4B94-BB9A-68CA0E6C75FD}" type="datetimeFigureOut">
               <a:rPr lang="en-IN" smtClean="0"/>
-              <a:t>31-03-2026</a:t>
+              <a:t>07-05-2026</a:t>
             </a:fld>
             <a:endParaRPr lang="en-IN"/>
           </a:p>
@@ -1117,7 +1122,7 @@
           <a:p>
             <a:fld id="{F5D1029C-D7E1-4B94-BB9A-68CA0E6C75FD}" type="datetimeFigureOut">
               <a:rPr lang="en-IN" smtClean="0"/>
-              <a:t>31-03-2026</a:t>
+              <a:t>07-05-2026</a:t>
             </a:fld>
             <a:endParaRPr lang="en-IN"/>
           </a:p>
@@ -1431,7 +1436,7 @@
           <a:p>
             <a:fld id="{F5D1029C-D7E1-4B94-BB9A-68CA0E6C75FD}" type="datetimeFigureOut">
               <a:rPr lang="en-IN" smtClean="0"/>
-              <a:t>31-03-2026</a:t>
+              <a:t>07-05-2026</a:t>
             </a:fld>
             <a:endParaRPr lang="en-IN"/>
           </a:p>
@@ -1764,7 +1769,7 @@
           <a:p>
             <a:fld id="{F5D1029C-D7E1-4B94-BB9A-68CA0E6C75FD}" type="datetimeFigureOut">
               <a:rPr lang="en-IN" smtClean="0"/>
-              <a:t>31-03-2026</a:t>
+              <a:t>07-05-2026</a:t>
             </a:fld>
             <a:endParaRPr lang="en-IN"/>
           </a:p>
@@ -2078,7 +2083,7 @@
           <a:p>
             <a:fld id="{F5D1029C-D7E1-4B94-BB9A-68CA0E6C75FD}" type="datetimeFigureOut">
               <a:rPr lang="en-IN" smtClean="0"/>
-              <a:t>31-03-2026</a:t>
+              <a:t>07-05-2026</a:t>
             </a:fld>
             <a:endParaRPr lang="en-IN"/>
           </a:p>
@@ -2471,7 +2476,7 @@
           <a:p>
             <a:fld id="{F5D1029C-D7E1-4B94-BB9A-68CA0E6C75FD}" type="datetimeFigureOut">
               <a:rPr lang="en-IN" smtClean="0"/>
-              <a:t>31-03-2026</a:t>
+              <a:t>07-05-2026</a:t>
             </a:fld>
             <a:endParaRPr lang="en-IN"/>
           </a:p>
@@ -2641,7 +2646,7 @@
           <a:p>
             <a:fld id="{F5D1029C-D7E1-4B94-BB9A-68CA0E6C75FD}" type="datetimeFigureOut">
               <a:rPr lang="en-IN" smtClean="0"/>
-              <a:t>31-03-2026</a:t>
+              <a:t>07-05-2026</a:t>
             </a:fld>
             <a:endParaRPr lang="en-IN"/>
           </a:p>
@@ -2821,7 +2826,7 @@
           <a:p>
             <a:fld id="{F5D1029C-D7E1-4B94-BB9A-68CA0E6C75FD}" type="datetimeFigureOut">
               <a:rPr lang="en-IN" smtClean="0"/>
-              <a:t>31-03-2026</a:t>
+              <a:t>07-05-2026</a:t>
             </a:fld>
             <a:endParaRPr lang="en-IN"/>
           </a:p>
@@ -2991,7 +2996,7 @@
           <a:p>
             <a:fld id="{F5D1029C-D7E1-4B94-BB9A-68CA0E6C75FD}" type="datetimeFigureOut">
               <a:rPr lang="en-IN" smtClean="0"/>
-              <a:t>31-03-2026</a:t>
+              <a:t>07-05-2026</a:t>
             </a:fld>
             <a:endParaRPr lang="en-IN"/>
           </a:p>
@@ -3238,7 +3243,7 @@
           <a:p>
             <a:fld id="{F5D1029C-D7E1-4B94-BB9A-68CA0E6C75FD}" type="datetimeFigureOut">
               <a:rPr lang="en-IN" smtClean="0"/>
-              <a:t>31-03-2026</a:t>
+              <a:t>07-05-2026</a:t>
             </a:fld>
             <a:endParaRPr lang="en-IN"/>
           </a:p>
@@ -3470,7 +3475,7 @@
           <a:p>
             <a:fld id="{F5D1029C-D7E1-4B94-BB9A-68CA0E6C75FD}" type="datetimeFigureOut">
               <a:rPr lang="en-IN" smtClean="0"/>
-              <a:t>31-03-2026</a:t>
+              <a:t>07-05-2026</a:t>
             </a:fld>
             <a:endParaRPr lang="en-IN"/>
           </a:p>
@@ -3844,7 +3849,7 @@
           <a:p>
             <a:fld id="{F5D1029C-D7E1-4B94-BB9A-68CA0E6C75FD}" type="datetimeFigureOut">
               <a:rPr lang="en-IN" smtClean="0"/>
-              <a:t>31-03-2026</a:t>
+              <a:t>07-05-2026</a:t>
             </a:fld>
             <a:endParaRPr lang="en-IN"/>
           </a:p>
@@ -3967,7 +3972,7 @@
           <a:p>
             <a:fld id="{F5D1029C-D7E1-4B94-BB9A-68CA0E6C75FD}" type="datetimeFigureOut">
               <a:rPr lang="en-IN" smtClean="0"/>
-              <a:t>31-03-2026</a:t>
+              <a:t>07-05-2026</a:t>
             </a:fld>
             <a:endParaRPr lang="en-IN"/>
           </a:p>
@@ -4062,7 +4067,7 @@
           <a:p>
             <a:fld id="{F5D1029C-D7E1-4B94-BB9A-68CA0E6C75FD}" type="datetimeFigureOut">
               <a:rPr lang="en-IN" smtClean="0"/>
-              <a:t>31-03-2026</a:t>
+              <a:t>07-05-2026</a:t>
             </a:fld>
             <a:endParaRPr lang="en-IN"/>
           </a:p>
@@ -4317,7 +4322,7 @@
           <a:p>
             <a:fld id="{F5D1029C-D7E1-4B94-BB9A-68CA0E6C75FD}" type="datetimeFigureOut">
               <a:rPr lang="en-IN" smtClean="0"/>
-              <a:t>31-03-2026</a:t>
+              <a:t>07-05-2026</a:t>
             </a:fld>
             <a:endParaRPr lang="en-IN"/>
           </a:p>
@@ -4622,7 +4627,7 @@
           <a:p>
             <a:fld id="{F5D1029C-D7E1-4B94-BB9A-68CA0E6C75FD}" type="datetimeFigureOut">
               <a:rPr lang="en-IN" smtClean="0"/>
-              <a:t>31-03-2026</a:t>
+              <a:t>07-05-2026</a:t>
             </a:fld>
             <a:endParaRPr lang="en-IN"/>
           </a:p>
@@ -5324,7 +5329,7 @@
           <a:p>
             <a:fld id="{F5D1029C-D7E1-4B94-BB9A-68CA0E6C75FD}" type="datetimeFigureOut">
               <a:rPr lang="en-IN" smtClean="0"/>
-              <a:t>31-03-2026</a:t>
+              <a:t>07-05-2026</a:t>
             </a:fld>
             <a:endParaRPr lang="en-IN"/>
           </a:p>
@@ -6415,6 +6420,2904 @@
           <p:cNvPr id="2" name="Title 1">
             <a:extLst>
               <a:ext uri="{FF2B5EF4-FFF2-40B4-BE49-F238E27FC236}">
+                <a16:creationId xmlns:a16="http://schemas.microsoft.com/office/drawing/2014/main" id="{AE814D3A-550B-F417-25F4-42CFC4C4BBCE}"/>
+              </a:ext>
+            </a:extLst>
+          </p:cNvPr>
+          <p:cNvSpPr>
+            <a:spLocks noGrp="1"/>
+          </p:cNvSpPr>
+          <p:nvPr>
+            <p:ph type="title"/>
+          </p:nvPr>
+        </p:nvSpPr>
+        <p:spPr/>
+        <p:txBody>
+          <a:bodyPr/>
+          <a:lstStyle/>
+          <a:p>
+            <a:r>
+              <a:rPr lang="en-US" dirty="0">
+                <a:latin typeface="Times New Roman" panose="02020603050405020304" pitchFamily="18" charset="0"/>
+                <a:cs typeface="Times New Roman" panose="02020603050405020304" pitchFamily="18" charset="0"/>
+              </a:rPr>
+              <a:t>Overall Progress</a:t>
+            </a:r>
+            <a:endParaRPr lang="en-IN" dirty="0">
+              <a:latin typeface="Times New Roman" panose="02020603050405020304" pitchFamily="18" charset="0"/>
+              <a:cs typeface="Times New Roman" panose="02020603050405020304" pitchFamily="18" charset="0"/>
+            </a:endParaRPr>
+          </a:p>
+        </p:txBody>
+      </p:sp>
+      <p:graphicFrame>
+        <p:nvGraphicFramePr>
+          <p:cNvPr id="4" name="Content Placeholder 3">
+            <a:extLst>
+              <a:ext uri="{FF2B5EF4-FFF2-40B4-BE49-F238E27FC236}">
+                <a16:creationId xmlns:a16="http://schemas.microsoft.com/office/drawing/2014/main" id="{209CE3D4-D17D-28DA-3CB4-CBFD1A4E57CA}"/>
+              </a:ext>
+            </a:extLst>
+          </p:cNvPr>
+          <p:cNvGraphicFramePr>
+            <a:graphicFrameLocks noGrp="1"/>
+          </p:cNvGraphicFramePr>
+          <p:nvPr>
+            <p:ph idx="1"/>
+            <p:extLst>
+              <p:ext uri="{D42A27DB-BD31-4B8C-83A1-F6EECF244321}">
+                <p14:modId xmlns:p14="http://schemas.microsoft.com/office/powerpoint/2010/main" val="658426062"/>
+              </p:ext>
+            </p:extLst>
+          </p:nvPr>
+        </p:nvGraphicFramePr>
+        <p:xfrm>
+          <a:off x="944880" y="1545763"/>
+          <a:ext cx="10342879" cy="4955647"/>
+        </p:xfrm>
+        <a:graphic>
+          <a:graphicData uri="http://schemas.openxmlformats.org/drawingml/2006/table">
+            <a:tbl>
+              <a:tblPr/>
+              <a:tblGrid>
+                <a:gridCol w="2390227">
+                  <a:extLst>
+                    <a:ext uri="{9D8B030D-6E8A-4147-A177-3AD203B41FA5}">
+                      <a16:colId xmlns:a16="http://schemas.microsoft.com/office/drawing/2014/main" val="4025702454"/>
+                    </a:ext>
+                  </a:extLst>
+                </a:gridCol>
+                <a:gridCol w="2650884">
+                  <a:extLst>
+                    <a:ext uri="{9D8B030D-6E8A-4147-A177-3AD203B41FA5}">
+                      <a16:colId xmlns:a16="http://schemas.microsoft.com/office/drawing/2014/main" val="2086941444"/>
+                    </a:ext>
+                  </a:extLst>
+                </a:gridCol>
+                <a:gridCol w="2650884">
+                  <a:extLst>
+                    <a:ext uri="{9D8B030D-6E8A-4147-A177-3AD203B41FA5}">
+                      <a16:colId xmlns:a16="http://schemas.microsoft.com/office/drawing/2014/main" val="138533785"/>
+                    </a:ext>
+                  </a:extLst>
+                </a:gridCol>
+                <a:gridCol w="2650884">
+                  <a:extLst>
+                    <a:ext uri="{9D8B030D-6E8A-4147-A177-3AD203B41FA5}">
+                      <a16:colId xmlns:a16="http://schemas.microsoft.com/office/drawing/2014/main" val="1801213805"/>
+                    </a:ext>
+                  </a:extLst>
+                </a:gridCol>
+              </a:tblGrid>
+              <a:tr h="250184">
+                <a:tc>
+                  <a:txBody>
+                    <a:bodyPr/>
+                    <a:lstStyle/>
+                    <a:p>
+                      <a:pPr>
+                        <a:buNone/>
+                      </a:pPr>
+                      <a:r>
+                        <a:rPr lang="en-IN" sz="1800" b="1" dirty="0">
+                          <a:latin typeface="Times New Roman" panose="02020603050405020304" pitchFamily="18" charset="0"/>
+                          <a:cs typeface="Times New Roman" panose="02020603050405020304" pitchFamily="18" charset="0"/>
+                        </a:rPr>
+                        <a:t>Layer</a:t>
+                      </a:r>
+                    </a:p>
+                  </a:txBody>
+                  <a:tcPr marL="49132" marR="49132" marT="24566" marB="24566" anchor="ctr">
+                    <a:lnL>
+                      <a:noFill/>
+                    </a:lnL>
+                    <a:lnR>
+                      <a:noFill/>
+                    </a:lnR>
+                    <a:lnT>
+                      <a:noFill/>
+                    </a:lnT>
+                    <a:lnB>
+                      <a:noFill/>
+                    </a:lnB>
+                    <a:noFill/>
+                  </a:tcPr>
+                </a:tc>
+                <a:tc>
+                  <a:txBody>
+                    <a:bodyPr/>
+                    <a:lstStyle/>
+                    <a:p>
+                      <a:pPr>
+                        <a:buNone/>
+                      </a:pPr>
+                      <a:r>
+                        <a:rPr lang="en-IN" sz="1800" b="1" dirty="0">
+                          <a:latin typeface="Times New Roman" panose="02020603050405020304" pitchFamily="18" charset="0"/>
+                          <a:cs typeface="Times New Roman" panose="02020603050405020304" pitchFamily="18" charset="0"/>
+                        </a:rPr>
+                        <a:t>Component</a:t>
+                      </a:r>
+                    </a:p>
+                  </a:txBody>
+                  <a:tcPr marL="49132" marR="49132" marT="24566" marB="24566" anchor="ctr">
+                    <a:lnL>
+                      <a:noFill/>
+                    </a:lnL>
+                    <a:lnR>
+                      <a:noFill/>
+                    </a:lnR>
+                    <a:lnT>
+                      <a:noFill/>
+                    </a:lnT>
+                    <a:lnB>
+                      <a:noFill/>
+                    </a:lnB>
+                    <a:noFill/>
+                  </a:tcPr>
+                </a:tc>
+                <a:tc>
+                  <a:txBody>
+                    <a:bodyPr/>
+                    <a:lstStyle/>
+                    <a:p>
+                      <a:pPr>
+                        <a:buNone/>
+                      </a:pPr>
+                      <a:r>
+                        <a:rPr lang="en-IN" sz="1800" b="1" dirty="0">
+                          <a:latin typeface="Times New Roman" panose="02020603050405020304" pitchFamily="18" charset="0"/>
+                          <a:cs typeface="Times New Roman" panose="02020603050405020304" pitchFamily="18" charset="0"/>
+                        </a:rPr>
+                        <a:t>Status</a:t>
+                      </a:r>
+                    </a:p>
+                  </a:txBody>
+                  <a:tcPr marL="49132" marR="49132" marT="24566" marB="24566" anchor="ctr">
+                    <a:lnL>
+                      <a:noFill/>
+                    </a:lnL>
+                    <a:lnR>
+                      <a:noFill/>
+                    </a:lnR>
+                    <a:lnT>
+                      <a:noFill/>
+                    </a:lnT>
+                    <a:lnB>
+                      <a:noFill/>
+                    </a:lnB>
+                    <a:noFill/>
+                  </a:tcPr>
+                </a:tc>
+                <a:tc>
+                  <a:txBody>
+                    <a:bodyPr/>
+                    <a:lstStyle/>
+                    <a:p>
+                      <a:pPr>
+                        <a:buNone/>
+                      </a:pPr>
+                      <a:r>
+                        <a:rPr lang="en-IN" sz="1800" b="1" dirty="0">
+                          <a:latin typeface="Times New Roman" panose="02020603050405020304" pitchFamily="18" charset="0"/>
+                          <a:cs typeface="Times New Roman" panose="02020603050405020304" pitchFamily="18" charset="0"/>
+                        </a:rPr>
+                        <a:t>Done</a:t>
+                      </a:r>
+                    </a:p>
+                  </a:txBody>
+                  <a:tcPr marL="49132" marR="49132" marT="24566" marB="24566" anchor="ctr">
+                    <a:lnL>
+                      <a:noFill/>
+                    </a:lnL>
+                    <a:lnR>
+                      <a:noFill/>
+                    </a:lnR>
+                    <a:lnT>
+                      <a:noFill/>
+                    </a:lnT>
+                    <a:lnB>
+                      <a:noFill/>
+                    </a:lnB>
+                    <a:noFill/>
+                  </a:tcPr>
+                </a:tc>
+                <a:extLst>
+                  <a:ext uri="{0D108BD9-81ED-4DB2-BD59-A6C34878D82A}">
+                    <a16:rowId xmlns:a16="http://schemas.microsoft.com/office/drawing/2014/main" val="2253899426"/>
+                  </a:ext>
+                </a:extLst>
+              </a:tr>
+              <a:tr h="250184">
+                <a:tc>
+                  <a:txBody>
+                    <a:bodyPr/>
+                    <a:lstStyle/>
+                    <a:p>
+                      <a:pPr>
+                        <a:buNone/>
+                      </a:pPr>
+                      <a:r>
+                        <a:rPr lang="en-IN" sz="1600" dirty="0">
+                          <a:latin typeface="Times New Roman" panose="02020603050405020304" pitchFamily="18" charset="0"/>
+                          <a:cs typeface="Times New Roman" panose="02020603050405020304" pitchFamily="18" charset="0"/>
+                        </a:rPr>
+                        <a:t>Backend core</a:t>
+                      </a:r>
+                    </a:p>
+                  </a:txBody>
+                  <a:tcPr marL="49132" marR="49132" marT="24566" marB="24566" anchor="ctr">
+                    <a:lnL>
+                      <a:noFill/>
+                    </a:lnL>
+                    <a:lnR>
+                      <a:noFill/>
+                    </a:lnR>
+                    <a:lnT>
+                      <a:noFill/>
+                    </a:lnT>
+                    <a:lnB>
+                      <a:noFill/>
+                    </a:lnB>
+                    <a:noFill/>
+                  </a:tcPr>
+                </a:tc>
+                <a:tc>
+                  <a:txBody>
+                    <a:bodyPr/>
+                    <a:lstStyle/>
+                    <a:p>
+                      <a:pPr>
+                        <a:buNone/>
+                      </a:pPr>
+                      <a:r>
+                        <a:rPr lang="en-IN" sz="1600" dirty="0">
+                          <a:latin typeface="Times New Roman" panose="02020603050405020304" pitchFamily="18" charset="0"/>
+                          <a:cs typeface="Times New Roman" panose="02020603050405020304" pitchFamily="18" charset="0"/>
+                        </a:rPr>
+                        <a:t>main.py</a:t>
+                      </a:r>
+                    </a:p>
+                  </a:txBody>
+                  <a:tcPr marL="49132" marR="49132" marT="24566" marB="24566" anchor="ctr">
+                    <a:lnL>
+                      <a:noFill/>
+                    </a:lnL>
+                    <a:lnR>
+                      <a:noFill/>
+                    </a:lnR>
+                    <a:lnT>
+                      <a:noFill/>
+                    </a:lnT>
+                    <a:lnB>
+                      <a:noFill/>
+                    </a:lnB>
+                    <a:noFill/>
+                  </a:tcPr>
+                </a:tc>
+                <a:tc>
+                  <a:txBody>
+                    <a:bodyPr/>
+                    <a:lstStyle/>
+                    <a:p>
+                      <a:pPr>
+                        <a:buNone/>
+                      </a:pPr>
+                      <a:r>
+                        <a:rPr lang="en-IN" sz="1600">
+                          <a:latin typeface="Times New Roman" panose="02020603050405020304" pitchFamily="18" charset="0"/>
+                          <a:cs typeface="Times New Roman" panose="02020603050405020304" pitchFamily="18" charset="0"/>
+                        </a:rPr>
+                        <a:t>✅ Real</a:t>
+                      </a:r>
+                    </a:p>
+                  </a:txBody>
+                  <a:tcPr marL="49132" marR="49132" marT="24566" marB="24566" anchor="ctr">
+                    <a:lnL>
+                      <a:noFill/>
+                    </a:lnL>
+                    <a:lnR>
+                      <a:noFill/>
+                    </a:lnR>
+                    <a:lnT>
+                      <a:noFill/>
+                    </a:lnT>
+                    <a:lnB>
+                      <a:noFill/>
+                    </a:lnB>
+                    <a:noFill/>
+                  </a:tcPr>
+                </a:tc>
+                <a:tc>
+                  <a:txBody>
+                    <a:bodyPr/>
+                    <a:lstStyle/>
+                    <a:p>
+                      <a:pPr>
+                        <a:buNone/>
+                      </a:pPr>
+                      <a:r>
+                        <a:rPr lang="en-IN" sz="1600" dirty="0">
+                          <a:latin typeface="Times New Roman" panose="02020603050405020304" pitchFamily="18" charset="0"/>
+                          <a:cs typeface="Times New Roman" panose="02020603050405020304" pitchFamily="18" charset="0"/>
+                        </a:rPr>
+                        <a:t>100%</a:t>
+                      </a:r>
+                    </a:p>
+                  </a:txBody>
+                  <a:tcPr marL="49132" marR="49132" marT="24566" marB="24566" anchor="ctr">
+                    <a:lnL>
+                      <a:noFill/>
+                    </a:lnL>
+                    <a:lnR>
+                      <a:noFill/>
+                    </a:lnR>
+                    <a:lnT>
+                      <a:noFill/>
+                    </a:lnT>
+                    <a:lnB>
+                      <a:noFill/>
+                    </a:lnB>
+                    <a:noFill/>
+                  </a:tcPr>
+                </a:tc>
+                <a:extLst>
+                  <a:ext uri="{0D108BD9-81ED-4DB2-BD59-A6C34878D82A}">
+                    <a16:rowId xmlns:a16="http://schemas.microsoft.com/office/drawing/2014/main" val="2249076453"/>
+                  </a:ext>
+                </a:extLst>
+              </a:tr>
+              <a:tr h="326917">
+                <a:tc>
+                  <a:txBody>
+                    <a:bodyPr/>
+                    <a:lstStyle/>
+                    <a:p>
+                      <a:pPr>
+                        <a:buNone/>
+                      </a:pPr>
+                      <a:r>
+                        <a:rPr lang="en-IN" sz="1600">
+                          <a:latin typeface="Times New Roman" panose="02020603050405020304" pitchFamily="18" charset="0"/>
+                          <a:cs typeface="Times New Roman" panose="02020603050405020304" pitchFamily="18" charset="0"/>
+                        </a:rPr>
+                        <a:t>Backend core</a:t>
+                      </a:r>
+                    </a:p>
+                  </a:txBody>
+                  <a:tcPr marL="49132" marR="49132" marT="24566" marB="24566" anchor="ctr">
+                    <a:lnL>
+                      <a:noFill/>
+                    </a:lnL>
+                    <a:lnR>
+                      <a:noFill/>
+                    </a:lnR>
+                    <a:lnT>
+                      <a:noFill/>
+                    </a:lnT>
+                    <a:lnB>
+                      <a:noFill/>
+                    </a:lnB>
+                    <a:noFill/>
+                  </a:tcPr>
+                </a:tc>
+                <a:tc>
+                  <a:txBody>
+                    <a:bodyPr/>
+                    <a:lstStyle/>
+                    <a:p>
+                      <a:pPr>
+                        <a:buNone/>
+                      </a:pPr>
+                      <a:r>
+                        <a:rPr lang="en-IN" sz="1600" dirty="0">
+                          <a:latin typeface="Times New Roman" panose="02020603050405020304" pitchFamily="18" charset="0"/>
+                          <a:cs typeface="Times New Roman" panose="02020603050405020304" pitchFamily="18" charset="0"/>
+                        </a:rPr>
+                        <a:t>trading_engine.py</a:t>
+                      </a:r>
+                    </a:p>
+                  </a:txBody>
+                  <a:tcPr marL="49132" marR="49132" marT="24566" marB="24566" anchor="ctr">
+                    <a:lnL>
+                      <a:noFill/>
+                    </a:lnL>
+                    <a:lnR>
+                      <a:noFill/>
+                    </a:lnR>
+                    <a:lnT>
+                      <a:noFill/>
+                    </a:lnT>
+                    <a:lnB>
+                      <a:noFill/>
+                    </a:lnB>
+                    <a:noFill/>
+                  </a:tcPr>
+                </a:tc>
+                <a:tc>
+                  <a:txBody>
+                    <a:bodyPr/>
+                    <a:lstStyle/>
+                    <a:p>
+                      <a:pPr>
+                        <a:buNone/>
+                      </a:pPr>
+                      <a:r>
+                        <a:rPr lang="en-IN" sz="1600">
+                          <a:latin typeface="Times New Roman" panose="02020603050405020304" pitchFamily="18" charset="0"/>
+                          <a:cs typeface="Times New Roman" panose="02020603050405020304" pitchFamily="18" charset="0"/>
+                        </a:rPr>
+                        <a:t>✅ Real</a:t>
+                      </a:r>
+                    </a:p>
+                  </a:txBody>
+                  <a:tcPr marL="49132" marR="49132" marT="24566" marB="24566" anchor="ctr">
+                    <a:lnL>
+                      <a:noFill/>
+                    </a:lnL>
+                    <a:lnR>
+                      <a:noFill/>
+                    </a:lnR>
+                    <a:lnT>
+                      <a:noFill/>
+                    </a:lnT>
+                    <a:lnB>
+                      <a:noFill/>
+                    </a:lnB>
+                    <a:noFill/>
+                  </a:tcPr>
+                </a:tc>
+                <a:tc>
+                  <a:txBody>
+                    <a:bodyPr/>
+                    <a:lstStyle/>
+                    <a:p>
+                      <a:pPr>
+                        <a:buNone/>
+                      </a:pPr>
+                      <a:r>
+                        <a:rPr lang="en-IN" sz="1600" dirty="0">
+                          <a:latin typeface="Times New Roman" panose="02020603050405020304" pitchFamily="18" charset="0"/>
+                          <a:cs typeface="Times New Roman" panose="02020603050405020304" pitchFamily="18" charset="0"/>
+                        </a:rPr>
+                        <a:t>95%</a:t>
+                      </a:r>
+                    </a:p>
+                  </a:txBody>
+                  <a:tcPr marL="49132" marR="49132" marT="24566" marB="24566" anchor="ctr">
+                    <a:lnL>
+                      <a:noFill/>
+                    </a:lnL>
+                    <a:lnR>
+                      <a:noFill/>
+                    </a:lnR>
+                    <a:lnT>
+                      <a:noFill/>
+                    </a:lnT>
+                    <a:lnB>
+                      <a:noFill/>
+                    </a:lnB>
+                    <a:noFill/>
+                  </a:tcPr>
+                </a:tc>
+                <a:extLst>
+                  <a:ext uri="{0D108BD9-81ED-4DB2-BD59-A6C34878D82A}">
+                    <a16:rowId xmlns:a16="http://schemas.microsoft.com/office/drawing/2014/main" val="3159694158"/>
+                  </a:ext>
+                </a:extLst>
+              </a:tr>
+              <a:tr h="326917">
+                <a:tc>
+                  <a:txBody>
+                    <a:bodyPr/>
+                    <a:lstStyle/>
+                    <a:p>
+                      <a:pPr>
+                        <a:buNone/>
+                      </a:pPr>
+                      <a:r>
+                        <a:rPr lang="en-IN" sz="1600">
+                          <a:latin typeface="Times New Roman" panose="02020603050405020304" pitchFamily="18" charset="0"/>
+                          <a:cs typeface="Times New Roman" panose="02020603050405020304" pitchFamily="18" charset="0"/>
+                        </a:rPr>
+                        <a:t>Backend core</a:t>
+                      </a:r>
+                    </a:p>
+                  </a:txBody>
+                  <a:tcPr marL="49132" marR="49132" marT="24566" marB="24566" anchor="ctr">
+                    <a:lnL>
+                      <a:noFill/>
+                    </a:lnL>
+                    <a:lnR>
+                      <a:noFill/>
+                    </a:lnR>
+                    <a:lnT>
+                      <a:noFill/>
+                    </a:lnT>
+                    <a:lnB>
+                      <a:noFill/>
+                    </a:lnB>
+                    <a:noFill/>
+                  </a:tcPr>
+                </a:tc>
+                <a:tc>
+                  <a:txBody>
+                    <a:bodyPr/>
+                    <a:lstStyle/>
+                    <a:p>
+                      <a:pPr>
+                        <a:buNone/>
+                      </a:pPr>
+                      <a:r>
+                        <a:rPr lang="en-IN" sz="1600">
+                          <a:latin typeface="Times New Roman" panose="02020603050405020304" pitchFamily="18" charset="0"/>
+                          <a:cs typeface="Times New Roman" panose="02020603050405020304" pitchFamily="18" charset="0"/>
+                        </a:rPr>
+                        <a:t>context_assembler.py</a:t>
+                      </a:r>
+                    </a:p>
+                  </a:txBody>
+                  <a:tcPr marL="49132" marR="49132" marT="24566" marB="24566" anchor="ctr">
+                    <a:lnL>
+                      <a:noFill/>
+                    </a:lnL>
+                    <a:lnR>
+                      <a:noFill/>
+                    </a:lnR>
+                    <a:lnT>
+                      <a:noFill/>
+                    </a:lnT>
+                    <a:lnB>
+                      <a:noFill/>
+                    </a:lnB>
+                    <a:noFill/>
+                  </a:tcPr>
+                </a:tc>
+                <a:tc>
+                  <a:txBody>
+                    <a:bodyPr/>
+                    <a:lstStyle/>
+                    <a:p>
+                      <a:pPr>
+                        <a:buNone/>
+                      </a:pPr>
+                      <a:r>
+                        <a:rPr lang="en-IN" sz="1600" dirty="0">
+                          <a:latin typeface="Times New Roman" panose="02020603050405020304" pitchFamily="18" charset="0"/>
+                          <a:cs typeface="Times New Roman" panose="02020603050405020304" pitchFamily="18" charset="0"/>
+                        </a:rPr>
+                        <a:t>✅ Real</a:t>
+                      </a:r>
+                    </a:p>
+                  </a:txBody>
+                  <a:tcPr marL="49132" marR="49132" marT="24566" marB="24566" anchor="ctr">
+                    <a:lnL>
+                      <a:noFill/>
+                    </a:lnL>
+                    <a:lnR>
+                      <a:noFill/>
+                    </a:lnR>
+                    <a:lnT>
+                      <a:noFill/>
+                    </a:lnT>
+                    <a:lnB>
+                      <a:noFill/>
+                    </a:lnB>
+                    <a:noFill/>
+                  </a:tcPr>
+                </a:tc>
+                <a:tc>
+                  <a:txBody>
+                    <a:bodyPr/>
+                    <a:lstStyle/>
+                    <a:p>
+                      <a:pPr>
+                        <a:buNone/>
+                      </a:pPr>
+                      <a:r>
+                        <a:rPr lang="en-IN" sz="1600" dirty="0">
+                          <a:latin typeface="Times New Roman" panose="02020603050405020304" pitchFamily="18" charset="0"/>
+                          <a:cs typeface="Times New Roman" panose="02020603050405020304" pitchFamily="18" charset="0"/>
+                        </a:rPr>
+                        <a:t>80%</a:t>
+                      </a:r>
+                    </a:p>
+                  </a:txBody>
+                  <a:tcPr marL="49132" marR="49132" marT="24566" marB="24566" anchor="ctr">
+                    <a:lnL>
+                      <a:noFill/>
+                    </a:lnL>
+                    <a:lnR>
+                      <a:noFill/>
+                    </a:lnR>
+                    <a:lnT>
+                      <a:noFill/>
+                    </a:lnT>
+                    <a:lnB>
+                      <a:noFill/>
+                    </a:lnB>
+                    <a:noFill/>
+                  </a:tcPr>
+                </a:tc>
+                <a:extLst>
+                  <a:ext uri="{0D108BD9-81ED-4DB2-BD59-A6C34878D82A}">
+                    <a16:rowId xmlns:a16="http://schemas.microsoft.com/office/drawing/2014/main" val="2314678566"/>
+                  </a:ext>
+                </a:extLst>
+              </a:tr>
+              <a:tr h="326917">
+                <a:tc>
+                  <a:txBody>
+                    <a:bodyPr/>
+                    <a:lstStyle/>
+                    <a:p>
+                      <a:pPr>
+                        <a:buNone/>
+                      </a:pPr>
+                      <a:r>
+                        <a:rPr lang="en-IN" sz="1600">
+                          <a:latin typeface="Times New Roman" panose="02020603050405020304" pitchFamily="18" charset="0"/>
+                          <a:cs typeface="Times New Roman" panose="02020603050405020304" pitchFamily="18" charset="0"/>
+                        </a:rPr>
+                        <a:t>Backend core</a:t>
+                      </a:r>
+                    </a:p>
+                  </a:txBody>
+                  <a:tcPr marL="49132" marR="49132" marT="24566" marB="24566" anchor="ctr">
+                    <a:lnL>
+                      <a:noFill/>
+                    </a:lnL>
+                    <a:lnR>
+                      <a:noFill/>
+                    </a:lnR>
+                    <a:lnT>
+                      <a:noFill/>
+                    </a:lnT>
+                    <a:lnB>
+                      <a:noFill/>
+                    </a:lnB>
+                    <a:noFill/>
+                  </a:tcPr>
+                </a:tc>
+                <a:tc>
+                  <a:txBody>
+                    <a:bodyPr/>
+                    <a:lstStyle/>
+                    <a:p>
+                      <a:pPr>
+                        <a:buNone/>
+                      </a:pPr>
+                      <a:r>
+                        <a:rPr lang="en-IN" sz="1600">
+                          <a:latin typeface="Times New Roman" panose="02020603050405020304" pitchFamily="18" charset="0"/>
+                          <a:cs typeface="Times New Roman" panose="02020603050405020304" pitchFamily="18" charset="0"/>
+                        </a:rPr>
+                        <a:t>orchestrator.py</a:t>
+                      </a:r>
+                    </a:p>
+                  </a:txBody>
+                  <a:tcPr marL="49132" marR="49132" marT="24566" marB="24566" anchor="ctr">
+                    <a:lnL>
+                      <a:noFill/>
+                    </a:lnL>
+                    <a:lnR>
+                      <a:noFill/>
+                    </a:lnR>
+                    <a:lnT>
+                      <a:noFill/>
+                    </a:lnT>
+                    <a:lnB>
+                      <a:noFill/>
+                    </a:lnB>
+                    <a:noFill/>
+                  </a:tcPr>
+                </a:tc>
+                <a:tc>
+                  <a:txBody>
+                    <a:bodyPr/>
+                    <a:lstStyle/>
+                    <a:p>
+                      <a:pPr>
+                        <a:buNone/>
+                      </a:pPr>
+                      <a:r>
+                        <a:rPr lang="en-IN" sz="1600" dirty="0">
+                          <a:latin typeface="Times New Roman" panose="02020603050405020304" pitchFamily="18" charset="0"/>
+                          <a:cs typeface="Times New Roman" panose="02020603050405020304" pitchFamily="18" charset="0"/>
+                        </a:rPr>
+                        <a:t>✅ Real</a:t>
+                      </a:r>
+                    </a:p>
+                  </a:txBody>
+                  <a:tcPr marL="49132" marR="49132" marT="24566" marB="24566" anchor="ctr">
+                    <a:lnL>
+                      <a:noFill/>
+                    </a:lnL>
+                    <a:lnR>
+                      <a:noFill/>
+                    </a:lnR>
+                    <a:lnT>
+                      <a:noFill/>
+                    </a:lnT>
+                    <a:lnB>
+                      <a:noFill/>
+                    </a:lnB>
+                    <a:noFill/>
+                  </a:tcPr>
+                </a:tc>
+                <a:tc>
+                  <a:txBody>
+                    <a:bodyPr/>
+                    <a:lstStyle/>
+                    <a:p>
+                      <a:pPr>
+                        <a:buNone/>
+                      </a:pPr>
+                      <a:r>
+                        <a:rPr lang="en-IN" sz="1600" dirty="0">
+                          <a:latin typeface="Times New Roman" panose="02020603050405020304" pitchFamily="18" charset="0"/>
+                          <a:cs typeface="Times New Roman" panose="02020603050405020304" pitchFamily="18" charset="0"/>
+                        </a:rPr>
+                        <a:t>85%</a:t>
+                      </a:r>
+                    </a:p>
+                  </a:txBody>
+                  <a:tcPr marL="49132" marR="49132" marT="24566" marB="24566" anchor="ctr">
+                    <a:lnL>
+                      <a:noFill/>
+                    </a:lnL>
+                    <a:lnR>
+                      <a:noFill/>
+                    </a:lnR>
+                    <a:lnT>
+                      <a:noFill/>
+                    </a:lnT>
+                    <a:lnB>
+                      <a:noFill/>
+                    </a:lnB>
+                    <a:noFill/>
+                  </a:tcPr>
+                </a:tc>
+                <a:extLst>
+                  <a:ext uri="{0D108BD9-81ED-4DB2-BD59-A6C34878D82A}">
+                    <a16:rowId xmlns:a16="http://schemas.microsoft.com/office/drawing/2014/main" val="1068206939"/>
+                  </a:ext>
+                </a:extLst>
+              </a:tr>
+              <a:tr h="326917">
+                <a:tc>
+                  <a:txBody>
+                    <a:bodyPr/>
+                    <a:lstStyle/>
+                    <a:p>
+                      <a:pPr>
+                        <a:buNone/>
+                      </a:pPr>
+                      <a:r>
+                        <a:rPr lang="en-IN" sz="1600">
+                          <a:latin typeface="Times New Roman" panose="02020603050405020304" pitchFamily="18" charset="0"/>
+                          <a:cs typeface="Times New Roman" panose="02020603050405020304" pitchFamily="18" charset="0"/>
+                        </a:rPr>
+                        <a:t>Config</a:t>
+                      </a:r>
+                    </a:p>
+                  </a:txBody>
+                  <a:tcPr marL="49132" marR="49132" marT="24566" marB="24566" anchor="ctr">
+                    <a:lnL>
+                      <a:noFill/>
+                    </a:lnL>
+                    <a:lnR>
+                      <a:noFill/>
+                    </a:lnR>
+                    <a:lnT>
+                      <a:noFill/>
+                    </a:lnT>
+                    <a:lnB>
+                      <a:noFill/>
+                    </a:lnB>
+                    <a:noFill/>
+                  </a:tcPr>
+                </a:tc>
+                <a:tc>
+                  <a:txBody>
+                    <a:bodyPr/>
+                    <a:lstStyle/>
+                    <a:p>
+                      <a:pPr>
+                        <a:buNone/>
+                      </a:pPr>
+                      <a:r>
+                        <a:rPr lang="en-IN" sz="1600" dirty="0">
+                          <a:latin typeface="Times New Roman" panose="02020603050405020304" pitchFamily="18" charset="0"/>
+                          <a:cs typeface="Times New Roman" panose="02020603050405020304" pitchFamily="18" charset="0"/>
+                        </a:rPr>
+                        <a:t>requirements.txt</a:t>
+                      </a:r>
+                    </a:p>
+                  </a:txBody>
+                  <a:tcPr marL="49132" marR="49132" marT="24566" marB="24566" anchor="ctr">
+                    <a:lnL>
+                      <a:noFill/>
+                    </a:lnL>
+                    <a:lnR>
+                      <a:noFill/>
+                    </a:lnR>
+                    <a:lnT>
+                      <a:noFill/>
+                    </a:lnT>
+                    <a:lnB>
+                      <a:noFill/>
+                    </a:lnB>
+                    <a:noFill/>
+                  </a:tcPr>
+                </a:tc>
+                <a:tc>
+                  <a:txBody>
+                    <a:bodyPr/>
+                    <a:lstStyle/>
+                    <a:p>
+                      <a:pPr>
+                        <a:buNone/>
+                      </a:pPr>
+                      <a:r>
+                        <a:rPr lang="en-IN" sz="1600">
+                          <a:latin typeface="Times New Roman" panose="02020603050405020304" pitchFamily="18" charset="0"/>
+                          <a:cs typeface="Times New Roman" panose="02020603050405020304" pitchFamily="18" charset="0"/>
+                        </a:rPr>
+                        <a:t>✅ Real</a:t>
+                      </a:r>
+                    </a:p>
+                  </a:txBody>
+                  <a:tcPr marL="49132" marR="49132" marT="24566" marB="24566" anchor="ctr">
+                    <a:lnL>
+                      <a:noFill/>
+                    </a:lnL>
+                    <a:lnR>
+                      <a:noFill/>
+                    </a:lnR>
+                    <a:lnT>
+                      <a:noFill/>
+                    </a:lnT>
+                    <a:lnB>
+                      <a:noFill/>
+                    </a:lnB>
+                    <a:noFill/>
+                  </a:tcPr>
+                </a:tc>
+                <a:tc>
+                  <a:txBody>
+                    <a:bodyPr/>
+                    <a:lstStyle/>
+                    <a:p>
+                      <a:pPr>
+                        <a:buNone/>
+                      </a:pPr>
+                      <a:r>
+                        <a:rPr lang="en-IN" sz="1600" dirty="0">
+                          <a:latin typeface="Times New Roman" panose="02020603050405020304" pitchFamily="18" charset="0"/>
+                          <a:cs typeface="Times New Roman" panose="02020603050405020304" pitchFamily="18" charset="0"/>
+                        </a:rPr>
+                        <a:t>100%</a:t>
+                      </a:r>
+                    </a:p>
+                  </a:txBody>
+                  <a:tcPr marL="49132" marR="49132" marT="24566" marB="24566" anchor="ctr">
+                    <a:lnL>
+                      <a:noFill/>
+                    </a:lnL>
+                    <a:lnR>
+                      <a:noFill/>
+                    </a:lnR>
+                    <a:lnT>
+                      <a:noFill/>
+                    </a:lnT>
+                    <a:lnB>
+                      <a:noFill/>
+                    </a:lnB>
+                    <a:noFill/>
+                  </a:tcPr>
+                </a:tc>
+                <a:extLst>
+                  <a:ext uri="{0D108BD9-81ED-4DB2-BD59-A6C34878D82A}">
+                    <a16:rowId xmlns:a16="http://schemas.microsoft.com/office/drawing/2014/main" val="3320280196"/>
+                  </a:ext>
+                </a:extLst>
+              </a:tr>
+              <a:tr h="250184">
+                <a:tc>
+                  <a:txBody>
+                    <a:bodyPr/>
+                    <a:lstStyle/>
+                    <a:p>
+                      <a:pPr>
+                        <a:buNone/>
+                      </a:pPr>
+                      <a:r>
+                        <a:rPr lang="en-IN" sz="1600">
+                          <a:latin typeface="Times New Roman" panose="02020603050405020304" pitchFamily="18" charset="0"/>
+                          <a:cs typeface="Times New Roman" panose="02020603050405020304" pitchFamily="18" charset="0"/>
+                        </a:rPr>
+                        <a:t>Config</a:t>
+                      </a:r>
+                    </a:p>
+                  </a:txBody>
+                  <a:tcPr marL="49132" marR="49132" marT="24566" marB="24566" anchor="ctr">
+                    <a:lnL>
+                      <a:noFill/>
+                    </a:lnL>
+                    <a:lnR>
+                      <a:noFill/>
+                    </a:lnR>
+                    <a:lnT>
+                      <a:noFill/>
+                    </a:lnT>
+                    <a:lnB>
+                      <a:noFill/>
+                    </a:lnB>
+                    <a:noFill/>
+                  </a:tcPr>
+                </a:tc>
+                <a:tc>
+                  <a:txBody>
+                    <a:bodyPr/>
+                    <a:lstStyle/>
+                    <a:p>
+                      <a:pPr>
+                        <a:buNone/>
+                      </a:pPr>
+                      <a:r>
+                        <a:rPr lang="en-IN" sz="1600">
+                          <a:latin typeface="Times New Roman" panose="02020603050405020304" pitchFamily="18" charset="0"/>
+                          <a:cs typeface="Times New Roman" panose="02020603050405020304" pitchFamily="18" charset="0"/>
+                        </a:rPr>
+                        <a:t>.env</a:t>
+                      </a:r>
+                    </a:p>
+                  </a:txBody>
+                  <a:tcPr marL="49132" marR="49132" marT="24566" marB="24566" anchor="ctr">
+                    <a:lnL>
+                      <a:noFill/>
+                    </a:lnL>
+                    <a:lnR>
+                      <a:noFill/>
+                    </a:lnR>
+                    <a:lnT>
+                      <a:noFill/>
+                    </a:lnT>
+                    <a:lnB>
+                      <a:noFill/>
+                    </a:lnB>
+                    <a:noFill/>
+                  </a:tcPr>
+                </a:tc>
+                <a:tc>
+                  <a:txBody>
+                    <a:bodyPr/>
+                    <a:lstStyle/>
+                    <a:p>
+                      <a:pPr>
+                        <a:buNone/>
+                      </a:pPr>
+                      <a:r>
+                        <a:rPr lang="en-IN" sz="1600">
+                          <a:latin typeface="Times New Roman" panose="02020603050405020304" pitchFamily="18" charset="0"/>
+                          <a:cs typeface="Times New Roman" panose="02020603050405020304" pitchFamily="18" charset="0"/>
+                        </a:rPr>
+                        <a:t>❌ Keys missing</a:t>
+                      </a:r>
+                    </a:p>
+                  </a:txBody>
+                  <a:tcPr marL="49132" marR="49132" marT="24566" marB="24566" anchor="ctr">
+                    <a:lnL>
+                      <a:noFill/>
+                    </a:lnL>
+                    <a:lnR>
+                      <a:noFill/>
+                    </a:lnR>
+                    <a:lnT>
+                      <a:noFill/>
+                    </a:lnT>
+                    <a:lnB>
+                      <a:noFill/>
+                    </a:lnB>
+                    <a:noFill/>
+                  </a:tcPr>
+                </a:tc>
+                <a:tc>
+                  <a:txBody>
+                    <a:bodyPr/>
+                    <a:lstStyle/>
+                    <a:p>
+                      <a:pPr>
+                        <a:buNone/>
+                      </a:pPr>
+                      <a:r>
+                        <a:rPr lang="en-IN" sz="1600" dirty="0">
+                          <a:latin typeface="Times New Roman" panose="02020603050405020304" pitchFamily="18" charset="0"/>
+                          <a:cs typeface="Times New Roman" panose="02020603050405020304" pitchFamily="18" charset="0"/>
+                        </a:rPr>
+                        <a:t>20%</a:t>
+                      </a:r>
+                    </a:p>
+                  </a:txBody>
+                  <a:tcPr marL="49132" marR="49132" marT="24566" marB="24566" anchor="ctr">
+                    <a:lnL>
+                      <a:noFill/>
+                    </a:lnL>
+                    <a:lnR>
+                      <a:noFill/>
+                    </a:lnR>
+                    <a:lnT>
+                      <a:noFill/>
+                    </a:lnT>
+                    <a:lnB>
+                      <a:noFill/>
+                    </a:lnB>
+                    <a:noFill/>
+                  </a:tcPr>
+                </a:tc>
+                <a:extLst>
+                  <a:ext uri="{0D108BD9-81ED-4DB2-BD59-A6C34878D82A}">
+                    <a16:rowId xmlns:a16="http://schemas.microsoft.com/office/drawing/2014/main" val="1567502014"/>
+                  </a:ext>
+                </a:extLst>
+              </a:tr>
+              <a:tr h="250184">
+                <a:tc>
+                  <a:txBody>
+                    <a:bodyPr/>
+                    <a:lstStyle/>
+                    <a:p>
+                      <a:pPr>
+                        <a:buNone/>
+                      </a:pPr>
+                      <a:r>
+                        <a:rPr lang="en-IN" sz="1600">
+                          <a:latin typeface="Times New Roman" panose="02020603050405020304" pitchFamily="18" charset="0"/>
+                          <a:cs typeface="Times New Roman" panose="02020603050405020304" pitchFamily="18" charset="0"/>
+                        </a:rPr>
+                        <a:t>Services</a:t>
+                      </a:r>
+                    </a:p>
+                  </a:txBody>
+                  <a:tcPr marL="49132" marR="49132" marT="24566" marB="24566" anchor="ctr">
+                    <a:lnL>
+                      <a:noFill/>
+                    </a:lnL>
+                    <a:lnR>
+                      <a:noFill/>
+                    </a:lnR>
+                    <a:lnT>
+                      <a:noFill/>
+                    </a:lnT>
+                    <a:lnB>
+                      <a:noFill/>
+                    </a:lnB>
+                    <a:noFill/>
+                  </a:tcPr>
+                </a:tc>
+                <a:tc>
+                  <a:txBody>
+                    <a:bodyPr/>
+                    <a:lstStyle/>
+                    <a:p>
+                      <a:pPr>
+                        <a:buNone/>
+                      </a:pPr>
+                      <a:r>
+                        <a:rPr lang="en-IN" sz="1600">
+                          <a:latin typeface="Times New Roman" panose="02020603050405020304" pitchFamily="18" charset="0"/>
+                          <a:cs typeface="Times New Roman" panose="02020603050405020304" pitchFamily="18" charset="0"/>
+                        </a:rPr>
+                        <a:t>gemini.py</a:t>
+                      </a:r>
+                    </a:p>
+                  </a:txBody>
+                  <a:tcPr marL="49132" marR="49132" marT="24566" marB="24566" anchor="ctr">
+                    <a:lnL>
+                      <a:noFill/>
+                    </a:lnL>
+                    <a:lnR>
+                      <a:noFill/>
+                    </a:lnR>
+                    <a:lnT>
+                      <a:noFill/>
+                    </a:lnT>
+                    <a:lnB>
+                      <a:noFill/>
+                    </a:lnB>
+                    <a:noFill/>
+                  </a:tcPr>
+                </a:tc>
+                <a:tc>
+                  <a:txBody>
+                    <a:bodyPr/>
+                    <a:lstStyle/>
+                    <a:p>
+                      <a:pPr>
+                        <a:buNone/>
+                      </a:pPr>
+                      <a:r>
+                        <a:rPr lang="en-IN" sz="1600">
+                          <a:latin typeface="Times New Roman" panose="02020603050405020304" pitchFamily="18" charset="0"/>
+                          <a:cs typeface="Times New Roman" panose="02020603050405020304" pitchFamily="18" charset="0"/>
+                        </a:rPr>
+                        <a:t>❓ Unknown</a:t>
+                      </a:r>
+                    </a:p>
+                  </a:txBody>
+                  <a:tcPr marL="49132" marR="49132" marT="24566" marB="24566" anchor="ctr">
+                    <a:lnL>
+                      <a:noFill/>
+                    </a:lnL>
+                    <a:lnR>
+                      <a:noFill/>
+                    </a:lnR>
+                    <a:lnT>
+                      <a:noFill/>
+                    </a:lnT>
+                    <a:lnB>
+                      <a:noFill/>
+                    </a:lnB>
+                    <a:noFill/>
+                  </a:tcPr>
+                </a:tc>
+                <a:tc>
+                  <a:txBody>
+                    <a:bodyPr/>
+                    <a:lstStyle/>
+                    <a:p>
+                      <a:pPr>
+                        <a:buNone/>
+                      </a:pPr>
+                      <a:r>
+                        <a:rPr lang="en-IN" sz="1600" dirty="0">
+                          <a:latin typeface="Times New Roman" panose="02020603050405020304" pitchFamily="18" charset="0"/>
+                          <a:cs typeface="Times New Roman" panose="02020603050405020304" pitchFamily="18" charset="0"/>
+                        </a:rPr>
+                        <a:t>?</a:t>
+                      </a:r>
+                    </a:p>
+                  </a:txBody>
+                  <a:tcPr marL="49132" marR="49132" marT="24566" marB="24566" anchor="ctr">
+                    <a:lnL>
+                      <a:noFill/>
+                    </a:lnL>
+                    <a:lnR>
+                      <a:noFill/>
+                    </a:lnR>
+                    <a:lnT>
+                      <a:noFill/>
+                    </a:lnT>
+                    <a:lnB>
+                      <a:noFill/>
+                    </a:lnB>
+                    <a:noFill/>
+                  </a:tcPr>
+                </a:tc>
+                <a:extLst>
+                  <a:ext uri="{0D108BD9-81ED-4DB2-BD59-A6C34878D82A}">
+                    <a16:rowId xmlns:a16="http://schemas.microsoft.com/office/drawing/2014/main" val="456938120"/>
+                  </a:ext>
+                </a:extLst>
+              </a:tr>
+              <a:tr h="326917">
+                <a:tc>
+                  <a:txBody>
+                    <a:bodyPr/>
+                    <a:lstStyle/>
+                    <a:p>
+                      <a:pPr>
+                        <a:buNone/>
+                      </a:pPr>
+                      <a:r>
+                        <a:rPr lang="en-IN" sz="1600">
+                          <a:latin typeface="Times New Roman" panose="02020603050405020304" pitchFamily="18" charset="0"/>
+                          <a:cs typeface="Times New Roman" panose="02020603050405020304" pitchFamily="18" charset="0"/>
+                        </a:rPr>
+                        <a:t>Services</a:t>
+                      </a:r>
+                    </a:p>
+                  </a:txBody>
+                  <a:tcPr marL="49132" marR="49132" marT="24566" marB="24566" anchor="ctr">
+                    <a:lnL>
+                      <a:noFill/>
+                    </a:lnL>
+                    <a:lnR>
+                      <a:noFill/>
+                    </a:lnR>
+                    <a:lnT>
+                      <a:noFill/>
+                    </a:lnT>
+                    <a:lnB>
+                      <a:noFill/>
+                    </a:lnB>
+                    <a:noFill/>
+                  </a:tcPr>
+                </a:tc>
+                <a:tc>
+                  <a:txBody>
+                    <a:bodyPr/>
+                    <a:lstStyle/>
+                    <a:p>
+                      <a:pPr>
+                        <a:buNone/>
+                      </a:pPr>
+                      <a:r>
+                        <a:rPr lang="en-IN" sz="1600">
+                          <a:latin typeface="Times New Roman" panose="02020603050405020304" pitchFamily="18" charset="0"/>
+                          <a:cs typeface="Times New Roman" panose="02020603050405020304" pitchFamily="18" charset="0"/>
+                        </a:rPr>
+                        <a:t>market_data.py</a:t>
+                      </a:r>
+                    </a:p>
+                  </a:txBody>
+                  <a:tcPr marL="49132" marR="49132" marT="24566" marB="24566" anchor="ctr">
+                    <a:lnL>
+                      <a:noFill/>
+                    </a:lnL>
+                    <a:lnR>
+                      <a:noFill/>
+                    </a:lnR>
+                    <a:lnT>
+                      <a:noFill/>
+                    </a:lnT>
+                    <a:lnB>
+                      <a:noFill/>
+                    </a:lnB>
+                    <a:noFill/>
+                  </a:tcPr>
+                </a:tc>
+                <a:tc>
+                  <a:txBody>
+                    <a:bodyPr/>
+                    <a:lstStyle/>
+                    <a:p>
+                      <a:pPr>
+                        <a:buNone/>
+                      </a:pPr>
+                      <a:r>
+                        <a:rPr lang="en-IN" sz="1600">
+                          <a:latin typeface="Times New Roman" panose="02020603050405020304" pitchFamily="18" charset="0"/>
+                          <a:cs typeface="Times New Roman" panose="02020603050405020304" pitchFamily="18" charset="0"/>
+                        </a:rPr>
+                        <a:t>❓ Unknown</a:t>
+                      </a:r>
+                    </a:p>
+                  </a:txBody>
+                  <a:tcPr marL="49132" marR="49132" marT="24566" marB="24566" anchor="ctr">
+                    <a:lnL>
+                      <a:noFill/>
+                    </a:lnL>
+                    <a:lnR>
+                      <a:noFill/>
+                    </a:lnR>
+                    <a:lnT>
+                      <a:noFill/>
+                    </a:lnT>
+                    <a:lnB>
+                      <a:noFill/>
+                    </a:lnB>
+                    <a:noFill/>
+                  </a:tcPr>
+                </a:tc>
+                <a:tc>
+                  <a:txBody>
+                    <a:bodyPr/>
+                    <a:lstStyle/>
+                    <a:p>
+                      <a:pPr>
+                        <a:buNone/>
+                      </a:pPr>
+                      <a:r>
+                        <a:rPr lang="en-IN" sz="1600">
+                          <a:latin typeface="Times New Roman" panose="02020603050405020304" pitchFamily="18" charset="0"/>
+                          <a:cs typeface="Times New Roman" panose="02020603050405020304" pitchFamily="18" charset="0"/>
+                        </a:rPr>
+                        <a:t>?</a:t>
+                      </a:r>
+                    </a:p>
+                  </a:txBody>
+                  <a:tcPr marL="49132" marR="49132" marT="24566" marB="24566" anchor="ctr">
+                    <a:lnL>
+                      <a:noFill/>
+                    </a:lnL>
+                    <a:lnR>
+                      <a:noFill/>
+                    </a:lnR>
+                    <a:lnT>
+                      <a:noFill/>
+                    </a:lnT>
+                    <a:lnB>
+                      <a:noFill/>
+                    </a:lnB>
+                    <a:noFill/>
+                  </a:tcPr>
+                </a:tc>
+                <a:extLst>
+                  <a:ext uri="{0D108BD9-81ED-4DB2-BD59-A6C34878D82A}">
+                    <a16:rowId xmlns:a16="http://schemas.microsoft.com/office/drawing/2014/main" val="3902996796"/>
+                  </a:ext>
+                </a:extLst>
+              </a:tr>
+              <a:tr h="250184">
+                <a:tc>
+                  <a:txBody>
+                    <a:bodyPr/>
+                    <a:lstStyle/>
+                    <a:p>
+                      <a:pPr>
+                        <a:buNone/>
+                      </a:pPr>
+                      <a:r>
+                        <a:rPr lang="en-IN" sz="1600">
+                          <a:latin typeface="Times New Roman" panose="02020603050405020304" pitchFamily="18" charset="0"/>
+                          <a:cs typeface="Times New Roman" panose="02020603050405020304" pitchFamily="18" charset="0"/>
+                        </a:rPr>
+                        <a:t>Services</a:t>
+                      </a:r>
+                    </a:p>
+                  </a:txBody>
+                  <a:tcPr marL="49132" marR="49132" marT="24566" marB="24566" anchor="ctr">
+                    <a:lnL>
+                      <a:noFill/>
+                    </a:lnL>
+                    <a:lnR>
+                      <a:noFill/>
+                    </a:lnR>
+                    <a:lnT>
+                      <a:noFill/>
+                    </a:lnT>
+                    <a:lnB>
+                      <a:noFill/>
+                    </a:lnB>
+                    <a:noFill/>
+                  </a:tcPr>
+                </a:tc>
+                <a:tc>
+                  <a:txBody>
+                    <a:bodyPr/>
+                    <a:lstStyle/>
+                    <a:p>
+                      <a:pPr>
+                        <a:buNone/>
+                      </a:pPr>
+                      <a:r>
+                        <a:rPr lang="en-IN" sz="1600">
+                          <a:latin typeface="Times New Roman" panose="02020603050405020304" pitchFamily="18" charset="0"/>
+                          <a:cs typeface="Times New Roman" panose="02020603050405020304" pitchFamily="18" charset="0"/>
+                        </a:rPr>
+                        <a:t>sentiment.py</a:t>
+                      </a:r>
+                    </a:p>
+                  </a:txBody>
+                  <a:tcPr marL="49132" marR="49132" marT="24566" marB="24566" anchor="ctr">
+                    <a:lnL>
+                      <a:noFill/>
+                    </a:lnL>
+                    <a:lnR>
+                      <a:noFill/>
+                    </a:lnR>
+                    <a:lnT>
+                      <a:noFill/>
+                    </a:lnT>
+                    <a:lnB>
+                      <a:noFill/>
+                    </a:lnB>
+                    <a:noFill/>
+                  </a:tcPr>
+                </a:tc>
+                <a:tc>
+                  <a:txBody>
+                    <a:bodyPr/>
+                    <a:lstStyle/>
+                    <a:p>
+                      <a:pPr>
+                        <a:buNone/>
+                      </a:pPr>
+                      <a:r>
+                        <a:rPr lang="en-IN" sz="1600">
+                          <a:latin typeface="Times New Roman" panose="02020603050405020304" pitchFamily="18" charset="0"/>
+                          <a:cs typeface="Times New Roman" panose="02020603050405020304" pitchFamily="18" charset="0"/>
+                        </a:rPr>
+                        <a:t>❓ Unknown</a:t>
+                      </a:r>
+                    </a:p>
+                  </a:txBody>
+                  <a:tcPr marL="49132" marR="49132" marT="24566" marB="24566" anchor="ctr">
+                    <a:lnL>
+                      <a:noFill/>
+                    </a:lnL>
+                    <a:lnR>
+                      <a:noFill/>
+                    </a:lnR>
+                    <a:lnT>
+                      <a:noFill/>
+                    </a:lnT>
+                    <a:lnB>
+                      <a:noFill/>
+                    </a:lnB>
+                    <a:noFill/>
+                  </a:tcPr>
+                </a:tc>
+                <a:tc>
+                  <a:txBody>
+                    <a:bodyPr/>
+                    <a:lstStyle/>
+                    <a:p>
+                      <a:pPr>
+                        <a:buNone/>
+                      </a:pPr>
+                      <a:r>
+                        <a:rPr lang="en-IN" sz="1600">
+                          <a:latin typeface="Times New Roman" panose="02020603050405020304" pitchFamily="18" charset="0"/>
+                          <a:cs typeface="Times New Roman" panose="02020603050405020304" pitchFamily="18" charset="0"/>
+                        </a:rPr>
+                        <a:t>?</a:t>
+                      </a:r>
+                    </a:p>
+                  </a:txBody>
+                  <a:tcPr marL="49132" marR="49132" marT="24566" marB="24566" anchor="ctr">
+                    <a:lnL>
+                      <a:noFill/>
+                    </a:lnL>
+                    <a:lnR>
+                      <a:noFill/>
+                    </a:lnR>
+                    <a:lnT>
+                      <a:noFill/>
+                    </a:lnT>
+                    <a:lnB>
+                      <a:noFill/>
+                    </a:lnB>
+                    <a:noFill/>
+                  </a:tcPr>
+                </a:tc>
+                <a:extLst>
+                  <a:ext uri="{0D108BD9-81ED-4DB2-BD59-A6C34878D82A}">
+                    <a16:rowId xmlns:a16="http://schemas.microsoft.com/office/drawing/2014/main" val="745922022"/>
+                  </a:ext>
+                </a:extLst>
+              </a:tr>
+              <a:tr h="326917">
+                <a:tc>
+                  <a:txBody>
+                    <a:bodyPr/>
+                    <a:lstStyle/>
+                    <a:p>
+                      <a:pPr>
+                        <a:buNone/>
+                      </a:pPr>
+                      <a:r>
+                        <a:rPr lang="en-IN" sz="1600">
+                          <a:latin typeface="Times New Roman" panose="02020603050405020304" pitchFamily="18" charset="0"/>
+                          <a:cs typeface="Times New Roman" panose="02020603050405020304" pitchFamily="18" charset="0"/>
+                        </a:rPr>
+                        <a:t>Services</a:t>
+                      </a:r>
+                    </a:p>
+                  </a:txBody>
+                  <a:tcPr marL="49132" marR="49132" marT="24566" marB="24566" anchor="ctr">
+                    <a:lnL>
+                      <a:noFill/>
+                    </a:lnL>
+                    <a:lnR>
+                      <a:noFill/>
+                    </a:lnR>
+                    <a:lnT>
+                      <a:noFill/>
+                    </a:lnT>
+                    <a:lnB>
+                      <a:noFill/>
+                    </a:lnB>
+                    <a:noFill/>
+                  </a:tcPr>
+                </a:tc>
+                <a:tc>
+                  <a:txBody>
+                    <a:bodyPr/>
+                    <a:lstStyle/>
+                    <a:p>
+                      <a:pPr>
+                        <a:buNone/>
+                      </a:pPr>
+                      <a:r>
+                        <a:rPr lang="en-IN" sz="1600">
+                          <a:latin typeface="Times New Roman" panose="02020603050405020304" pitchFamily="18" charset="0"/>
+                          <a:cs typeface="Times New Roman" panose="02020603050405020304" pitchFamily="18" charset="0"/>
+                        </a:rPr>
+                        <a:t>signals_engine.py</a:t>
+                      </a:r>
+                    </a:p>
+                  </a:txBody>
+                  <a:tcPr marL="49132" marR="49132" marT="24566" marB="24566" anchor="ctr">
+                    <a:lnL>
+                      <a:noFill/>
+                    </a:lnL>
+                    <a:lnR>
+                      <a:noFill/>
+                    </a:lnR>
+                    <a:lnT>
+                      <a:noFill/>
+                    </a:lnT>
+                    <a:lnB>
+                      <a:noFill/>
+                    </a:lnB>
+                    <a:noFill/>
+                  </a:tcPr>
+                </a:tc>
+                <a:tc>
+                  <a:txBody>
+                    <a:bodyPr/>
+                    <a:lstStyle/>
+                    <a:p>
+                      <a:pPr>
+                        <a:buNone/>
+                      </a:pPr>
+                      <a:r>
+                        <a:rPr lang="en-IN" sz="1600">
+                          <a:latin typeface="Times New Roman" panose="02020603050405020304" pitchFamily="18" charset="0"/>
+                          <a:cs typeface="Times New Roman" panose="02020603050405020304" pitchFamily="18" charset="0"/>
+                        </a:rPr>
+                        <a:t>❓ Unknown</a:t>
+                      </a:r>
+                    </a:p>
+                  </a:txBody>
+                  <a:tcPr marL="49132" marR="49132" marT="24566" marB="24566" anchor="ctr">
+                    <a:lnL>
+                      <a:noFill/>
+                    </a:lnL>
+                    <a:lnR>
+                      <a:noFill/>
+                    </a:lnR>
+                    <a:lnT>
+                      <a:noFill/>
+                    </a:lnT>
+                    <a:lnB>
+                      <a:noFill/>
+                    </a:lnB>
+                    <a:noFill/>
+                  </a:tcPr>
+                </a:tc>
+                <a:tc>
+                  <a:txBody>
+                    <a:bodyPr/>
+                    <a:lstStyle/>
+                    <a:p>
+                      <a:pPr>
+                        <a:buNone/>
+                      </a:pPr>
+                      <a:r>
+                        <a:rPr lang="en-IN" sz="1600">
+                          <a:latin typeface="Times New Roman" panose="02020603050405020304" pitchFamily="18" charset="0"/>
+                          <a:cs typeface="Times New Roman" panose="02020603050405020304" pitchFamily="18" charset="0"/>
+                        </a:rPr>
+                        <a:t>?</a:t>
+                      </a:r>
+                    </a:p>
+                  </a:txBody>
+                  <a:tcPr marL="49132" marR="49132" marT="24566" marB="24566" anchor="ctr">
+                    <a:lnL>
+                      <a:noFill/>
+                    </a:lnL>
+                    <a:lnR>
+                      <a:noFill/>
+                    </a:lnR>
+                    <a:lnT>
+                      <a:noFill/>
+                    </a:lnT>
+                    <a:lnB>
+                      <a:noFill/>
+                    </a:lnB>
+                    <a:noFill/>
+                  </a:tcPr>
+                </a:tc>
+                <a:extLst>
+                  <a:ext uri="{0D108BD9-81ED-4DB2-BD59-A6C34878D82A}">
+                    <a16:rowId xmlns:a16="http://schemas.microsoft.com/office/drawing/2014/main" val="685174446"/>
+                  </a:ext>
+                </a:extLst>
+              </a:tr>
+              <a:tr h="326917">
+                <a:tc>
+                  <a:txBody>
+                    <a:bodyPr/>
+                    <a:lstStyle/>
+                    <a:p>
+                      <a:pPr>
+                        <a:buNone/>
+                      </a:pPr>
+                      <a:r>
+                        <a:rPr lang="en-IN" sz="1600">
+                          <a:latin typeface="Times New Roman" panose="02020603050405020304" pitchFamily="18" charset="0"/>
+                          <a:cs typeface="Times New Roman" panose="02020603050405020304" pitchFamily="18" charset="0"/>
+                        </a:rPr>
+                        <a:t>Services</a:t>
+                      </a:r>
+                    </a:p>
+                  </a:txBody>
+                  <a:tcPr marL="49132" marR="49132" marT="24566" marB="24566" anchor="ctr">
+                    <a:lnL>
+                      <a:noFill/>
+                    </a:lnL>
+                    <a:lnR>
+                      <a:noFill/>
+                    </a:lnR>
+                    <a:lnT>
+                      <a:noFill/>
+                    </a:lnT>
+                    <a:lnB>
+                      <a:noFill/>
+                    </a:lnB>
+                    <a:noFill/>
+                  </a:tcPr>
+                </a:tc>
+                <a:tc>
+                  <a:txBody>
+                    <a:bodyPr/>
+                    <a:lstStyle/>
+                    <a:p>
+                      <a:pPr>
+                        <a:buNone/>
+                      </a:pPr>
+                      <a:r>
+                        <a:rPr lang="en-IN" sz="1600">
+                          <a:latin typeface="Times New Roman" panose="02020603050405020304" pitchFamily="18" charset="0"/>
+                          <a:cs typeface="Times New Roman" panose="02020603050405020304" pitchFamily="18" charset="0"/>
+                        </a:rPr>
+                        <a:t>ipo_tracker.py</a:t>
+                      </a:r>
+                    </a:p>
+                  </a:txBody>
+                  <a:tcPr marL="49132" marR="49132" marT="24566" marB="24566" anchor="ctr">
+                    <a:lnL>
+                      <a:noFill/>
+                    </a:lnL>
+                    <a:lnR>
+                      <a:noFill/>
+                    </a:lnR>
+                    <a:lnT>
+                      <a:noFill/>
+                    </a:lnT>
+                    <a:lnB>
+                      <a:noFill/>
+                    </a:lnB>
+                    <a:noFill/>
+                  </a:tcPr>
+                </a:tc>
+                <a:tc>
+                  <a:txBody>
+                    <a:bodyPr/>
+                    <a:lstStyle/>
+                    <a:p>
+                      <a:pPr>
+                        <a:buNone/>
+                      </a:pPr>
+                      <a:r>
+                        <a:rPr lang="en-IN" sz="1600">
+                          <a:latin typeface="Times New Roman" panose="02020603050405020304" pitchFamily="18" charset="0"/>
+                          <a:cs typeface="Times New Roman" panose="02020603050405020304" pitchFamily="18" charset="0"/>
+                        </a:rPr>
+                        <a:t>❓ Unknown</a:t>
+                      </a:r>
+                    </a:p>
+                  </a:txBody>
+                  <a:tcPr marL="49132" marR="49132" marT="24566" marB="24566" anchor="ctr">
+                    <a:lnL>
+                      <a:noFill/>
+                    </a:lnL>
+                    <a:lnR>
+                      <a:noFill/>
+                    </a:lnR>
+                    <a:lnT>
+                      <a:noFill/>
+                    </a:lnT>
+                    <a:lnB>
+                      <a:noFill/>
+                    </a:lnB>
+                    <a:noFill/>
+                  </a:tcPr>
+                </a:tc>
+                <a:tc>
+                  <a:txBody>
+                    <a:bodyPr/>
+                    <a:lstStyle/>
+                    <a:p>
+                      <a:pPr>
+                        <a:buNone/>
+                      </a:pPr>
+                      <a:r>
+                        <a:rPr lang="en-IN" sz="1600">
+                          <a:latin typeface="Times New Roman" panose="02020603050405020304" pitchFamily="18" charset="0"/>
+                          <a:cs typeface="Times New Roman" panose="02020603050405020304" pitchFamily="18" charset="0"/>
+                        </a:rPr>
+                        <a:t>?</a:t>
+                      </a:r>
+                    </a:p>
+                  </a:txBody>
+                  <a:tcPr marL="49132" marR="49132" marT="24566" marB="24566" anchor="ctr">
+                    <a:lnL>
+                      <a:noFill/>
+                    </a:lnL>
+                    <a:lnR>
+                      <a:noFill/>
+                    </a:lnR>
+                    <a:lnT>
+                      <a:noFill/>
+                    </a:lnT>
+                    <a:lnB>
+                      <a:noFill/>
+                    </a:lnB>
+                    <a:noFill/>
+                  </a:tcPr>
+                </a:tc>
+                <a:extLst>
+                  <a:ext uri="{0D108BD9-81ED-4DB2-BD59-A6C34878D82A}">
+                    <a16:rowId xmlns:a16="http://schemas.microsoft.com/office/drawing/2014/main" val="3191608643"/>
+                  </a:ext>
+                </a:extLst>
+              </a:tr>
+              <a:tr h="250184">
+                <a:tc>
+                  <a:txBody>
+                    <a:bodyPr/>
+                    <a:lstStyle/>
+                    <a:p>
+                      <a:pPr>
+                        <a:buNone/>
+                      </a:pPr>
+                      <a:r>
+                        <a:rPr lang="en-IN" sz="1600">
+                          <a:latin typeface="Times New Roman" panose="02020603050405020304" pitchFamily="18" charset="0"/>
+                          <a:cs typeface="Times New Roman" panose="02020603050405020304" pitchFamily="18" charset="0"/>
+                        </a:rPr>
+                        <a:t>Services</a:t>
+                      </a:r>
+                    </a:p>
+                  </a:txBody>
+                  <a:tcPr marL="49132" marR="49132" marT="24566" marB="24566" anchor="ctr">
+                    <a:lnL>
+                      <a:noFill/>
+                    </a:lnL>
+                    <a:lnR>
+                      <a:noFill/>
+                    </a:lnR>
+                    <a:lnT>
+                      <a:noFill/>
+                    </a:lnT>
+                    <a:lnB>
+                      <a:noFill/>
+                    </a:lnB>
+                    <a:noFill/>
+                  </a:tcPr>
+                </a:tc>
+                <a:tc>
+                  <a:txBody>
+                    <a:bodyPr/>
+                    <a:lstStyle/>
+                    <a:p>
+                      <a:pPr>
+                        <a:buNone/>
+                      </a:pPr>
+                      <a:r>
+                        <a:rPr lang="en-IN" sz="1600">
+                          <a:latin typeface="Times New Roman" panose="02020603050405020304" pitchFamily="18" charset="0"/>
+                          <a:cs typeface="Times New Roman" panose="02020603050405020304" pitchFamily="18" charset="0"/>
+                        </a:rPr>
+                        <a:t>rag.py</a:t>
+                      </a:r>
+                    </a:p>
+                  </a:txBody>
+                  <a:tcPr marL="49132" marR="49132" marT="24566" marB="24566" anchor="ctr">
+                    <a:lnL>
+                      <a:noFill/>
+                    </a:lnL>
+                    <a:lnR>
+                      <a:noFill/>
+                    </a:lnR>
+                    <a:lnT>
+                      <a:noFill/>
+                    </a:lnT>
+                    <a:lnB>
+                      <a:noFill/>
+                    </a:lnB>
+                    <a:noFill/>
+                  </a:tcPr>
+                </a:tc>
+                <a:tc>
+                  <a:txBody>
+                    <a:bodyPr/>
+                    <a:lstStyle/>
+                    <a:p>
+                      <a:pPr>
+                        <a:buNone/>
+                      </a:pPr>
+                      <a:r>
+                        <a:rPr lang="en-IN" sz="1600">
+                          <a:latin typeface="Times New Roman" panose="02020603050405020304" pitchFamily="18" charset="0"/>
+                          <a:cs typeface="Times New Roman" panose="02020603050405020304" pitchFamily="18" charset="0"/>
+                        </a:rPr>
+                        <a:t>❓ Unknown</a:t>
+                      </a:r>
+                    </a:p>
+                  </a:txBody>
+                  <a:tcPr marL="49132" marR="49132" marT="24566" marB="24566" anchor="ctr">
+                    <a:lnL>
+                      <a:noFill/>
+                    </a:lnL>
+                    <a:lnR>
+                      <a:noFill/>
+                    </a:lnR>
+                    <a:lnT>
+                      <a:noFill/>
+                    </a:lnT>
+                    <a:lnB>
+                      <a:noFill/>
+                    </a:lnB>
+                    <a:noFill/>
+                  </a:tcPr>
+                </a:tc>
+                <a:tc>
+                  <a:txBody>
+                    <a:bodyPr/>
+                    <a:lstStyle/>
+                    <a:p>
+                      <a:pPr>
+                        <a:buNone/>
+                      </a:pPr>
+                      <a:r>
+                        <a:rPr lang="en-IN" sz="1600">
+                          <a:latin typeface="Times New Roman" panose="02020603050405020304" pitchFamily="18" charset="0"/>
+                          <a:cs typeface="Times New Roman" panose="02020603050405020304" pitchFamily="18" charset="0"/>
+                        </a:rPr>
+                        <a:t>?</a:t>
+                      </a:r>
+                    </a:p>
+                  </a:txBody>
+                  <a:tcPr marL="49132" marR="49132" marT="24566" marB="24566" anchor="ctr">
+                    <a:lnL>
+                      <a:noFill/>
+                    </a:lnL>
+                    <a:lnR>
+                      <a:noFill/>
+                    </a:lnR>
+                    <a:lnT>
+                      <a:noFill/>
+                    </a:lnT>
+                    <a:lnB>
+                      <a:noFill/>
+                    </a:lnB>
+                    <a:noFill/>
+                  </a:tcPr>
+                </a:tc>
+                <a:extLst>
+                  <a:ext uri="{0D108BD9-81ED-4DB2-BD59-A6C34878D82A}">
+                    <a16:rowId xmlns:a16="http://schemas.microsoft.com/office/drawing/2014/main" val="3836584885"/>
+                  </a:ext>
+                </a:extLst>
+              </a:tr>
+              <a:tr h="250184">
+                <a:tc>
+                  <a:txBody>
+                    <a:bodyPr/>
+                    <a:lstStyle/>
+                    <a:p>
+                      <a:pPr>
+                        <a:buNone/>
+                      </a:pPr>
+                      <a:r>
+                        <a:rPr lang="en-IN" sz="1600">
+                          <a:latin typeface="Times New Roman" panose="02020603050405020304" pitchFamily="18" charset="0"/>
+                          <a:cs typeface="Times New Roman" panose="02020603050405020304" pitchFamily="18" charset="0"/>
+                        </a:rPr>
+                        <a:t>Data</a:t>
+                      </a:r>
+                    </a:p>
+                  </a:txBody>
+                  <a:tcPr marL="49132" marR="49132" marT="24566" marB="24566" anchor="ctr">
+                    <a:lnL>
+                      <a:noFill/>
+                    </a:lnL>
+                    <a:lnR>
+                      <a:noFill/>
+                    </a:lnR>
+                    <a:lnT>
+                      <a:noFill/>
+                    </a:lnT>
+                    <a:lnB>
+                      <a:noFill/>
+                    </a:lnB>
+                    <a:noFill/>
+                  </a:tcPr>
+                </a:tc>
+                <a:tc>
+                  <a:txBody>
+                    <a:bodyPr/>
+                    <a:lstStyle/>
+                    <a:p>
+                      <a:pPr>
+                        <a:buNone/>
+                      </a:pPr>
+                      <a:r>
+                        <a:rPr lang="en-IN" sz="1600">
+                          <a:latin typeface="Times New Roman" panose="02020603050405020304" pitchFamily="18" charset="0"/>
+                          <a:cs typeface="Times New Roman" panose="02020603050405020304" pitchFamily="18" charset="0"/>
+                        </a:rPr>
+                        <a:t>ChromaDB corpus</a:t>
+                      </a:r>
+                    </a:p>
+                  </a:txBody>
+                  <a:tcPr marL="49132" marR="49132" marT="24566" marB="24566" anchor="ctr">
+                    <a:lnL>
+                      <a:noFill/>
+                    </a:lnL>
+                    <a:lnR>
+                      <a:noFill/>
+                    </a:lnR>
+                    <a:lnT>
+                      <a:noFill/>
+                    </a:lnT>
+                    <a:lnB>
+                      <a:noFill/>
+                    </a:lnB>
+                    <a:noFill/>
+                  </a:tcPr>
+                </a:tc>
+                <a:tc>
+                  <a:txBody>
+                    <a:bodyPr/>
+                    <a:lstStyle/>
+                    <a:p>
+                      <a:pPr>
+                        <a:buNone/>
+                      </a:pPr>
+                      <a:r>
+                        <a:rPr lang="en-IN" sz="1600">
+                          <a:latin typeface="Times New Roman" panose="02020603050405020304" pitchFamily="18" charset="0"/>
+                          <a:cs typeface="Times New Roman" panose="02020603050405020304" pitchFamily="18" charset="0"/>
+                        </a:rPr>
+                        <a:t>❌ Empty</a:t>
+                      </a:r>
+                    </a:p>
+                  </a:txBody>
+                  <a:tcPr marL="49132" marR="49132" marT="24566" marB="24566" anchor="ctr">
+                    <a:lnL>
+                      <a:noFill/>
+                    </a:lnL>
+                    <a:lnR>
+                      <a:noFill/>
+                    </a:lnR>
+                    <a:lnT>
+                      <a:noFill/>
+                    </a:lnT>
+                    <a:lnB>
+                      <a:noFill/>
+                    </a:lnB>
+                    <a:noFill/>
+                  </a:tcPr>
+                </a:tc>
+                <a:tc>
+                  <a:txBody>
+                    <a:bodyPr/>
+                    <a:lstStyle/>
+                    <a:p>
+                      <a:pPr>
+                        <a:buNone/>
+                      </a:pPr>
+                      <a:r>
+                        <a:rPr lang="en-IN" sz="1600">
+                          <a:latin typeface="Times New Roman" panose="02020603050405020304" pitchFamily="18" charset="0"/>
+                          <a:cs typeface="Times New Roman" panose="02020603050405020304" pitchFamily="18" charset="0"/>
+                        </a:rPr>
+                        <a:t>0%</a:t>
+                      </a:r>
+                    </a:p>
+                  </a:txBody>
+                  <a:tcPr marL="49132" marR="49132" marT="24566" marB="24566" anchor="ctr">
+                    <a:lnL>
+                      <a:noFill/>
+                    </a:lnL>
+                    <a:lnR>
+                      <a:noFill/>
+                    </a:lnR>
+                    <a:lnT>
+                      <a:noFill/>
+                    </a:lnT>
+                    <a:lnB>
+                      <a:noFill/>
+                    </a:lnB>
+                    <a:noFill/>
+                  </a:tcPr>
+                </a:tc>
+                <a:extLst>
+                  <a:ext uri="{0D108BD9-81ED-4DB2-BD59-A6C34878D82A}">
+                    <a16:rowId xmlns:a16="http://schemas.microsoft.com/office/drawing/2014/main" val="4123279507"/>
+                  </a:ext>
+                </a:extLst>
+              </a:tr>
+              <a:tr h="250184">
+                <a:tc>
+                  <a:txBody>
+                    <a:bodyPr/>
+                    <a:lstStyle/>
+                    <a:p>
+                      <a:pPr>
+                        <a:buNone/>
+                      </a:pPr>
+                      <a:r>
+                        <a:rPr lang="en-IN" sz="1600">
+                          <a:latin typeface="Times New Roman" panose="02020603050405020304" pitchFamily="18" charset="0"/>
+                          <a:cs typeface="Times New Roman" panose="02020603050405020304" pitchFamily="18" charset="0"/>
+                        </a:rPr>
+                        <a:t>Frontend</a:t>
+                      </a:r>
+                    </a:p>
+                  </a:txBody>
+                  <a:tcPr marL="49132" marR="49132" marT="24566" marB="24566" anchor="ctr">
+                    <a:lnL>
+                      <a:noFill/>
+                    </a:lnL>
+                    <a:lnR>
+                      <a:noFill/>
+                    </a:lnR>
+                    <a:lnT>
+                      <a:noFill/>
+                    </a:lnT>
+                    <a:lnB>
+                      <a:noFill/>
+                    </a:lnB>
+                    <a:noFill/>
+                  </a:tcPr>
+                </a:tc>
+                <a:tc>
+                  <a:txBody>
+                    <a:bodyPr/>
+                    <a:lstStyle/>
+                    <a:p>
+                      <a:pPr>
+                        <a:buNone/>
+                      </a:pPr>
+                      <a:r>
+                        <a:rPr lang="en-IN" sz="1600">
+                          <a:latin typeface="Times New Roman" panose="02020603050405020304" pitchFamily="18" charset="0"/>
+                          <a:cs typeface="Times New Roman" panose="02020603050405020304" pitchFamily="18" charset="0"/>
+                        </a:rPr>
+                        <a:t>React UI</a:t>
+                      </a:r>
+                    </a:p>
+                  </a:txBody>
+                  <a:tcPr marL="49132" marR="49132" marT="24566" marB="24566" anchor="ctr">
+                    <a:lnL>
+                      <a:noFill/>
+                    </a:lnL>
+                    <a:lnR>
+                      <a:noFill/>
+                    </a:lnR>
+                    <a:lnT>
+                      <a:noFill/>
+                    </a:lnT>
+                    <a:lnB>
+                      <a:noFill/>
+                    </a:lnB>
+                    <a:noFill/>
+                  </a:tcPr>
+                </a:tc>
+                <a:tc>
+                  <a:txBody>
+                    <a:bodyPr/>
+                    <a:lstStyle/>
+                    <a:p>
+                      <a:pPr>
+                        <a:buNone/>
+                      </a:pPr>
+                      <a:r>
+                        <a:rPr lang="en-IN" sz="1600">
+                          <a:latin typeface="Times New Roman" panose="02020603050405020304" pitchFamily="18" charset="0"/>
+                          <a:cs typeface="Times New Roman" panose="02020603050405020304" pitchFamily="18" charset="0"/>
+                        </a:rPr>
+                        <a:t>⚠️ Streaming bug</a:t>
+                      </a:r>
+                    </a:p>
+                  </a:txBody>
+                  <a:tcPr marL="49132" marR="49132" marT="24566" marB="24566" anchor="ctr">
+                    <a:lnL>
+                      <a:noFill/>
+                    </a:lnL>
+                    <a:lnR>
+                      <a:noFill/>
+                    </a:lnR>
+                    <a:lnT>
+                      <a:noFill/>
+                    </a:lnT>
+                    <a:lnB>
+                      <a:noFill/>
+                    </a:lnB>
+                    <a:noFill/>
+                  </a:tcPr>
+                </a:tc>
+                <a:tc>
+                  <a:txBody>
+                    <a:bodyPr/>
+                    <a:lstStyle/>
+                    <a:p>
+                      <a:pPr>
+                        <a:buNone/>
+                      </a:pPr>
+                      <a:r>
+                        <a:rPr lang="en-IN" sz="1600">
+                          <a:latin typeface="Times New Roman" panose="02020603050405020304" pitchFamily="18" charset="0"/>
+                          <a:cs typeface="Times New Roman" panose="02020603050405020304" pitchFamily="18" charset="0"/>
+                        </a:rPr>
+                        <a:t>60%</a:t>
+                      </a:r>
+                    </a:p>
+                  </a:txBody>
+                  <a:tcPr marL="49132" marR="49132" marT="24566" marB="24566" anchor="ctr">
+                    <a:lnL>
+                      <a:noFill/>
+                    </a:lnL>
+                    <a:lnR>
+                      <a:noFill/>
+                    </a:lnR>
+                    <a:lnT>
+                      <a:noFill/>
+                    </a:lnT>
+                    <a:lnB>
+                      <a:noFill/>
+                    </a:lnB>
+                    <a:noFill/>
+                  </a:tcPr>
+                </a:tc>
+                <a:extLst>
+                  <a:ext uri="{0D108BD9-81ED-4DB2-BD59-A6C34878D82A}">
+                    <a16:rowId xmlns:a16="http://schemas.microsoft.com/office/drawing/2014/main" val="1478295449"/>
+                  </a:ext>
+                </a:extLst>
+              </a:tr>
+              <a:tr h="250184">
+                <a:tc>
+                  <a:txBody>
+                    <a:bodyPr/>
+                    <a:lstStyle/>
+                    <a:p>
+                      <a:pPr>
+                        <a:buNone/>
+                      </a:pPr>
+                      <a:r>
+                        <a:rPr lang="en-IN" sz="1600">
+                          <a:latin typeface="Times New Roman" panose="02020603050405020304" pitchFamily="18" charset="0"/>
+                          <a:cs typeface="Times New Roman" panose="02020603050405020304" pitchFamily="18" charset="0"/>
+                        </a:rPr>
+                        <a:t>Routers</a:t>
+                      </a:r>
+                    </a:p>
+                  </a:txBody>
+                  <a:tcPr marL="49132" marR="49132" marT="24566" marB="24566" anchor="ctr">
+                    <a:lnL>
+                      <a:noFill/>
+                    </a:lnL>
+                    <a:lnR>
+                      <a:noFill/>
+                    </a:lnR>
+                    <a:lnT>
+                      <a:noFill/>
+                    </a:lnT>
+                    <a:lnB>
+                      <a:noFill/>
+                    </a:lnB>
+                    <a:noFill/>
+                  </a:tcPr>
+                </a:tc>
+                <a:tc>
+                  <a:txBody>
+                    <a:bodyPr/>
+                    <a:lstStyle/>
+                    <a:p>
+                      <a:pPr>
+                        <a:buNone/>
+                      </a:pPr>
+                      <a:r>
+                        <a:rPr lang="en-IN" sz="1600">
+                          <a:latin typeface="Times New Roman" panose="02020603050405020304" pitchFamily="18" charset="0"/>
+                          <a:cs typeface="Times New Roman" panose="02020603050405020304" pitchFamily="18" charset="0"/>
+                        </a:rPr>
+                        <a:t>All 6 routers</a:t>
+                      </a:r>
+                    </a:p>
+                  </a:txBody>
+                  <a:tcPr marL="49132" marR="49132" marT="24566" marB="24566" anchor="ctr">
+                    <a:lnL>
+                      <a:noFill/>
+                    </a:lnL>
+                    <a:lnR>
+                      <a:noFill/>
+                    </a:lnR>
+                    <a:lnT>
+                      <a:noFill/>
+                    </a:lnT>
+                    <a:lnB>
+                      <a:noFill/>
+                    </a:lnB>
+                    <a:noFill/>
+                  </a:tcPr>
+                </a:tc>
+                <a:tc>
+                  <a:txBody>
+                    <a:bodyPr/>
+                    <a:lstStyle/>
+                    <a:p>
+                      <a:pPr>
+                        <a:buNone/>
+                      </a:pPr>
+                      <a:r>
+                        <a:rPr lang="en-IN" sz="1600">
+                          <a:latin typeface="Times New Roman" panose="02020603050405020304" pitchFamily="18" charset="0"/>
+                          <a:cs typeface="Times New Roman" panose="02020603050405020304" pitchFamily="18" charset="0"/>
+                        </a:rPr>
+                        <a:t>❓ Unknown</a:t>
+                      </a:r>
+                    </a:p>
+                  </a:txBody>
+                  <a:tcPr marL="49132" marR="49132" marT="24566" marB="24566" anchor="ctr">
+                    <a:lnL>
+                      <a:noFill/>
+                    </a:lnL>
+                    <a:lnR>
+                      <a:noFill/>
+                    </a:lnR>
+                    <a:lnT>
+                      <a:noFill/>
+                    </a:lnT>
+                    <a:lnB>
+                      <a:noFill/>
+                    </a:lnB>
+                    <a:noFill/>
+                  </a:tcPr>
+                </a:tc>
+                <a:tc>
+                  <a:txBody>
+                    <a:bodyPr/>
+                    <a:lstStyle/>
+                    <a:p>
+                      <a:pPr>
+                        <a:buNone/>
+                      </a:pPr>
+                      <a:r>
+                        <a:rPr lang="en-IN" sz="1600" dirty="0">
+                          <a:latin typeface="Times New Roman" panose="02020603050405020304" pitchFamily="18" charset="0"/>
+                          <a:cs typeface="Times New Roman" panose="02020603050405020304" pitchFamily="18" charset="0"/>
+                        </a:rPr>
+                        <a:t>?</a:t>
+                      </a:r>
+                    </a:p>
+                  </a:txBody>
+                  <a:tcPr marL="49132" marR="49132" marT="24566" marB="24566" anchor="ctr">
+                    <a:lnL>
+                      <a:noFill/>
+                    </a:lnL>
+                    <a:lnR>
+                      <a:noFill/>
+                    </a:lnR>
+                    <a:lnT>
+                      <a:noFill/>
+                    </a:lnT>
+                    <a:lnB>
+                      <a:noFill/>
+                    </a:lnB>
+                    <a:noFill/>
+                  </a:tcPr>
+                </a:tc>
+                <a:extLst>
+                  <a:ext uri="{0D108BD9-81ED-4DB2-BD59-A6C34878D82A}">
+                    <a16:rowId xmlns:a16="http://schemas.microsoft.com/office/drawing/2014/main" val="1181160287"/>
+                  </a:ext>
+                </a:extLst>
+              </a:tr>
+            </a:tbl>
+          </a:graphicData>
+        </a:graphic>
+      </p:graphicFrame>
+    </p:spTree>
+    <p:extLst>
+      <p:ext uri="{BB962C8B-B14F-4D97-AF65-F5344CB8AC3E}">
+        <p14:creationId xmlns:p14="http://schemas.microsoft.com/office/powerpoint/2010/main" val="370544169"/>
+      </p:ext>
+    </p:extLst>
+  </p:cSld>
+  <p:clrMapOvr>
+    <a:masterClrMapping/>
+  </p:clrMapOvr>
+</p:sld>
+</file>
+
+<file path=ppt/slides/slide11.xml><?xml version="1.0" encoding="utf-8"?>
+<p:sld xmlns:a="http://schemas.openxmlformats.org/drawingml/2006/main" xmlns:r="http://schemas.openxmlformats.org/officeDocument/2006/relationships" xmlns:p="http://schemas.openxmlformats.org/presentationml/2006/main">
+  <p:cSld>
+    <p:spTree>
+      <p:nvGrpSpPr>
+        <p:cNvPr id="1" name=""/>
+        <p:cNvGrpSpPr/>
+        <p:nvPr/>
+      </p:nvGrpSpPr>
+      <p:grpSpPr>
+        <a:xfrm>
+          <a:off x="0" y="0"/>
+          <a:ext cx="0" cy="0"/>
+          <a:chOff x="0" y="0"/>
+          <a:chExt cx="0" cy="0"/>
+        </a:xfrm>
+      </p:grpSpPr>
+      <p:sp>
+        <p:nvSpPr>
+          <p:cNvPr id="2" name="Title 1">
+            <a:extLst>
+              <a:ext uri="{FF2B5EF4-FFF2-40B4-BE49-F238E27FC236}">
+                <a16:creationId xmlns:a16="http://schemas.microsoft.com/office/drawing/2014/main" id="{F7078CB3-9364-5483-01A1-0EA271F50A55}"/>
+              </a:ext>
+            </a:extLst>
+          </p:cNvPr>
+          <p:cNvSpPr>
+            <a:spLocks noGrp="1"/>
+          </p:cNvSpPr>
+          <p:nvPr>
+            <p:ph type="title"/>
+          </p:nvPr>
+        </p:nvSpPr>
+        <p:spPr/>
+        <p:txBody>
+          <a:bodyPr/>
+          <a:lstStyle/>
+          <a:p>
+            <a:r>
+              <a:rPr lang="en-US" dirty="0">
+                <a:latin typeface="Times New Roman" panose="02020603050405020304" pitchFamily="18" charset="0"/>
+                <a:cs typeface="Times New Roman" panose="02020603050405020304" pitchFamily="18" charset="0"/>
+              </a:rPr>
+              <a:t>Snapshots</a:t>
+            </a:r>
+            <a:endParaRPr lang="en-IN" dirty="0">
+              <a:latin typeface="Times New Roman" panose="02020603050405020304" pitchFamily="18" charset="0"/>
+              <a:cs typeface="Times New Roman" panose="02020603050405020304" pitchFamily="18" charset="0"/>
+            </a:endParaRPr>
+          </a:p>
+        </p:txBody>
+      </p:sp>
+      <p:pic>
+        <p:nvPicPr>
+          <p:cNvPr id="9" name="Content Placeholder 8">
+            <a:extLst>
+              <a:ext uri="{FF2B5EF4-FFF2-40B4-BE49-F238E27FC236}">
+                <a16:creationId xmlns:a16="http://schemas.microsoft.com/office/drawing/2014/main" id="{AE4BB02B-A52B-9915-624C-11262F0C9446}"/>
+              </a:ext>
+            </a:extLst>
+          </p:cNvPr>
+          <p:cNvPicPr>
+            <a:picLocks noGrp="1" noChangeAspect="1"/>
+          </p:cNvPicPr>
+          <p:nvPr>
+            <p:ph idx="1"/>
+          </p:nvPr>
+        </p:nvPicPr>
+        <p:blipFill>
+          <a:blip r:embed="rId2">
+            <a:extLst>
+              <a:ext uri="{28A0092B-C50C-407E-A947-70E740481C1C}">
+                <a14:useLocalDpi xmlns:a14="http://schemas.microsoft.com/office/drawing/2010/main" val="0"/>
+              </a:ext>
+            </a:extLst>
+          </a:blip>
+          <a:stretch>
+            <a:fillRect/>
+          </a:stretch>
+        </p:blipFill>
+        <p:spPr>
+          <a:xfrm>
+            <a:off x="853440" y="1686560"/>
+            <a:ext cx="8769339" cy="4355465"/>
+          </a:xfrm>
+          <a:prstGeom prst="rect">
+            <a:avLst/>
+          </a:prstGeom>
+        </p:spPr>
+      </p:pic>
+    </p:spTree>
+    <p:extLst>
+      <p:ext uri="{BB962C8B-B14F-4D97-AF65-F5344CB8AC3E}">
+        <p14:creationId xmlns:p14="http://schemas.microsoft.com/office/powerpoint/2010/main" val="1471352243"/>
+      </p:ext>
+    </p:extLst>
+  </p:cSld>
+  <p:clrMapOvr>
+    <a:masterClrMapping/>
+  </p:clrMapOvr>
+</p:sld>
+</file>
+
+<file path=ppt/slides/slide12.xml><?xml version="1.0" encoding="utf-8"?>
+<p:sld xmlns:a="http://schemas.openxmlformats.org/drawingml/2006/main" xmlns:r="http://schemas.openxmlformats.org/officeDocument/2006/relationships" xmlns:p="http://schemas.openxmlformats.org/presentationml/2006/main">
+  <p:cSld>
+    <p:spTree>
+      <p:nvGrpSpPr>
+        <p:cNvPr id="1" name="">
+          <a:extLst>
+            <a:ext uri="{FF2B5EF4-FFF2-40B4-BE49-F238E27FC236}">
+              <a16:creationId xmlns:a16="http://schemas.microsoft.com/office/drawing/2014/main" id="{D7933B5D-0F55-8FCF-60D8-9F509280117F}"/>
+            </a:ext>
+          </a:extLst>
+        </p:cNvPr>
+        <p:cNvGrpSpPr/>
+        <p:nvPr/>
+      </p:nvGrpSpPr>
+      <p:grpSpPr>
+        <a:xfrm>
+          <a:off x="0" y="0"/>
+          <a:ext cx="0" cy="0"/>
+          <a:chOff x="0" y="0"/>
+          <a:chExt cx="0" cy="0"/>
+        </a:xfrm>
+      </p:grpSpPr>
+      <p:sp>
+        <p:nvSpPr>
+          <p:cNvPr id="2" name="Title 1">
+            <a:extLst>
+              <a:ext uri="{FF2B5EF4-FFF2-40B4-BE49-F238E27FC236}">
+                <a16:creationId xmlns:a16="http://schemas.microsoft.com/office/drawing/2014/main" id="{2883C51A-1BA4-0CB0-FFA7-B1F94E222DFC}"/>
+              </a:ext>
+            </a:extLst>
+          </p:cNvPr>
+          <p:cNvSpPr>
+            <a:spLocks noGrp="1"/>
+          </p:cNvSpPr>
+          <p:nvPr>
+            <p:ph type="title"/>
+          </p:nvPr>
+        </p:nvSpPr>
+        <p:spPr/>
+        <p:txBody>
+          <a:bodyPr/>
+          <a:lstStyle/>
+          <a:p>
+            <a:r>
+              <a:rPr lang="en-US" dirty="0">
+                <a:latin typeface="Times New Roman" panose="02020603050405020304" pitchFamily="18" charset="0"/>
+                <a:cs typeface="Times New Roman" panose="02020603050405020304" pitchFamily="18" charset="0"/>
+              </a:rPr>
+              <a:t>Snapshots</a:t>
+            </a:r>
+            <a:endParaRPr lang="en-IN" dirty="0">
+              <a:latin typeface="Times New Roman" panose="02020603050405020304" pitchFamily="18" charset="0"/>
+              <a:cs typeface="Times New Roman" panose="02020603050405020304" pitchFamily="18" charset="0"/>
+            </a:endParaRPr>
+          </a:p>
+        </p:txBody>
+      </p:sp>
+      <p:pic>
+        <p:nvPicPr>
+          <p:cNvPr id="6" name="Content Placeholder 5">
+            <a:extLst>
+              <a:ext uri="{FF2B5EF4-FFF2-40B4-BE49-F238E27FC236}">
+                <a16:creationId xmlns:a16="http://schemas.microsoft.com/office/drawing/2014/main" id="{B33BB1DD-DDE8-86AA-E688-B8B770F097A9}"/>
+              </a:ext>
+            </a:extLst>
+          </p:cNvPr>
+          <p:cNvPicPr>
+            <a:picLocks noGrp="1" noChangeAspect="1"/>
+          </p:cNvPicPr>
+          <p:nvPr>
+            <p:ph idx="1"/>
+          </p:nvPr>
+        </p:nvPicPr>
+        <p:blipFill>
+          <a:blip r:embed="rId2">
+            <a:extLst>
+              <a:ext uri="{28A0092B-C50C-407E-A947-70E740481C1C}">
+                <a14:useLocalDpi xmlns:a14="http://schemas.microsoft.com/office/drawing/2010/main" val="0"/>
+              </a:ext>
+            </a:extLst>
+          </a:blip>
+          <a:stretch>
+            <a:fillRect/>
+          </a:stretch>
+        </p:blipFill>
+        <p:spPr>
+          <a:xfrm>
+            <a:off x="1021832" y="1727200"/>
+            <a:ext cx="9036568" cy="4314825"/>
+          </a:xfrm>
+          <a:prstGeom prst="rect">
+            <a:avLst/>
+          </a:prstGeom>
+        </p:spPr>
+      </p:pic>
+    </p:spTree>
+    <p:extLst>
+      <p:ext uri="{BB962C8B-B14F-4D97-AF65-F5344CB8AC3E}">
+        <p14:creationId xmlns:p14="http://schemas.microsoft.com/office/powerpoint/2010/main" val="610248115"/>
+      </p:ext>
+    </p:extLst>
+  </p:cSld>
+  <p:clrMapOvr>
+    <a:masterClrMapping/>
+  </p:clrMapOvr>
+</p:sld>
+</file>
+
+<file path=ppt/slides/slide13.xml><?xml version="1.0" encoding="utf-8"?>
+<p:sld xmlns:a="http://schemas.openxmlformats.org/drawingml/2006/main" xmlns:r="http://schemas.openxmlformats.org/officeDocument/2006/relationships" xmlns:p="http://schemas.openxmlformats.org/presentationml/2006/main">
+  <p:cSld>
+    <p:spTree>
+      <p:nvGrpSpPr>
+        <p:cNvPr id="1" name="">
+          <a:extLst>
+            <a:ext uri="{FF2B5EF4-FFF2-40B4-BE49-F238E27FC236}">
+              <a16:creationId xmlns:a16="http://schemas.microsoft.com/office/drawing/2014/main" id="{18FCF30A-AC24-B846-8FE8-014B050E87B7}"/>
+            </a:ext>
+          </a:extLst>
+        </p:cNvPr>
+        <p:cNvGrpSpPr/>
+        <p:nvPr/>
+      </p:nvGrpSpPr>
+      <p:grpSpPr>
+        <a:xfrm>
+          <a:off x="0" y="0"/>
+          <a:ext cx="0" cy="0"/>
+          <a:chOff x="0" y="0"/>
+          <a:chExt cx="0" cy="0"/>
+        </a:xfrm>
+      </p:grpSpPr>
+      <p:sp>
+        <p:nvSpPr>
+          <p:cNvPr id="2" name="Title 1">
+            <a:extLst>
+              <a:ext uri="{FF2B5EF4-FFF2-40B4-BE49-F238E27FC236}">
+                <a16:creationId xmlns:a16="http://schemas.microsoft.com/office/drawing/2014/main" id="{C86F87EB-79CC-F641-1A0E-644D7AA2B169}"/>
+              </a:ext>
+            </a:extLst>
+          </p:cNvPr>
+          <p:cNvSpPr>
+            <a:spLocks noGrp="1"/>
+          </p:cNvSpPr>
+          <p:nvPr>
+            <p:ph type="title"/>
+          </p:nvPr>
+        </p:nvSpPr>
+        <p:spPr/>
+        <p:txBody>
+          <a:bodyPr/>
+          <a:lstStyle/>
+          <a:p>
+            <a:r>
+              <a:rPr lang="en-US" dirty="0">
+                <a:latin typeface="Times New Roman" panose="02020603050405020304" pitchFamily="18" charset="0"/>
+                <a:cs typeface="Times New Roman" panose="02020603050405020304" pitchFamily="18" charset="0"/>
+              </a:rPr>
+              <a:t>Snapshots</a:t>
+            </a:r>
+            <a:endParaRPr lang="en-IN" dirty="0">
+              <a:latin typeface="Times New Roman" panose="02020603050405020304" pitchFamily="18" charset="0"/>
+              <a:cs typeface="Times New Roman" panose="02020603050405020304" pitchFamily="18" charset="0"/>
+            </a:endParaRPr>
+          </a:p>
+        </p:txBody>
+      </p:sp>
+      <p:pic>
+        <p:nvPicPr>
+          <p:cNvPr id="7" name="Content Placeholder 6">
+            <a:extLst>
+              <a:ext uri="{FF2B5EF4-FFF2-40B4-BE49-F238E27FC236}">
+                <a16:creationId xmlns:a16="http://schemas.microsoft.com/office/drawing/2014/main" id="{E15261E1-D13D-A972-A800-A575FEBD6A8D}"/>
+              </a:ext>
+            </a:extLst>
+          </p:cNvPr>
+          <p:cNvPicPr>
+            <a:picLocks noGrp="1" noChangeAspect="1"/>
+          </p:cNvPicPr>
+          <p:nvPr>
+            <p:ph idx="1"/>
+          </p:nvPr>
+        </p:nvPicPr>
+        <p:blipFill>
+          <a:blip r:embed="rId2">
+            <a:extLst>
+              <a:ext uri="{28A0092B-C50C-407E-A947-70E740481C1C}">
+                <a14:useLocalDpi xmlns:a14="http://schemas.microsoft.com/office/drawing/2010/main" val="0"/>
+              </a:ext>
+            </a:extLst>
+          </a:blip>
+          <a:stretch>
+            <a:fillRect/>
+          </a:stretch>
+        </p:blipFill>
+        <p:spPr>
+          <a:xfrm>
+            <a:off x="1013182" y="1564640"/>
+            <a:ext cx="9431297" cy="4477385"/>
+          </a:xfrm>
+          <a:prstGeom prst="rect">
+            <a:avLst/>
+          </a:prstGeom>
+        </p:spPr>
+      </p:pic>
+    </p:spTree>
+    <p:extLst>
+      <p:ext uri="{BB962C8B-B14F-4D97-AF65-F5344CB8AC3E}">
+        <p14:creationId xmlns:p14="http://schemas.microsoft.com/office/powerpoint/2010/main" val="1714403"/>
+      </p:ext>
+    </p:extLst>
+  </p:cSld>
+  <p:clrMapOvr>
+    <a:masterClrMapping/>
+  </p:clrMapOvr>
+</p:sld>
+</file>
+
+<file path=ppt/slides/slide14.xml><?xml version="1.0" encoding="utf-8"?>
+<p:sld xmlns:a="http://schemas.openxmlformats.org/drawingml/2006/main" xmlns:r="http://schemas.openxmlformats.org/officeDocument/2006/relationships" xmlns:p="http://schemas.openxmlformats.org/presentationml/2006/main">
+  <p:cSld>
+    <p:spTree>
+      <p:nvGrpSpPr>
+        <p:cNvPr id="1" name=""/>
+        <p:cNvGrpSpPr/>
+        <p:nvPr/>
+      </p:nvGrpSpPr>
+      <p:grpSpPr>
+        <a:xfrm>
+          <a:off x="0" y="0"/>
+          <a:ext cx="0" cy="0"/>
+          <a:chOff x="0" y="0"/>
+          <a:chExt cx="0" cy="0"/>
+        </a:xfrm>
+      </p:grpSpPr>
+      <p:sp>
+        <p:nvSpPr>
+          <p:cNvPr id="2" name="Title 1">
+            <a:extLst>
+              <a:ext uri="{FF2B5EF4-FFF2-40B4-BE49-F238E27FC236}">
+                <a16:creationId xmlns:a16="http://schemas.microsoft.com/office/drawing/2014/main" id="{1ACFA5D6-2268-380F-122B-DDDF1C7EEA5F}"/>
+              </a:ext>
+            </a:extLst>
+          </p:cNvPr>
+          <p:cNvSpPr>
+            <a:spLocks noGrp="1"/>
+          </p:cNvSpPr>
+          <p:nvPr>
+            <p:ph type="title"/>
+          </p:nvPr>
+        </p:nvSpPr>
+        <p:spPr/>
+        <p:txBody>
+          <a:bodyPr/>
+          <a:lstStyle/>
+          <a:p>
+            <a:r>
+              <a:rPr lang="en-US" dirty="0">
+                <a:latin typeface="Times New Roman" panose="02020603050405020304" pitchFamily="18" charset="0"/>
+                <a:cs typeface="Times New Roman" panose="02020603050405020304" pitchFamily="18" charset="0"/>
+              </a:rPr>
+              <a:t>Conclusion</a:t>
+            </a:r>
+            <a:endParaRPr lang="en-IN" dirty="0">
+              <a:latin typeface="Times New Roman" panose="02020603050405020304" pitchFamily="18" charset="0"/>
+              <a:cs typeface="Times New Roman" panose="02020603050405020304" pitchFamily="18" charset="0"/>
+            </a:endParaRPr>
+          </a:p>
+        </p:txBody>
+      </p:sp>
+      <p:sp>
+        <p:nvSpPr>
+          <p:cNvPr id="3" name="Content Placeholder 2">
+            <a:extLst>
+              <a:ext uri="{FF2B5EF4-FFF2-40B4-BE49-F238E27FC236}">
+                <a16:creationId xmlns:a16="http://schemas.microsoft.com/office/drawing/2014/main" id="{7211F119-D91E-95B2-CEBB-22F0C185C5CD}"/>
+              </a:ext>
+            </a:extLst>
+          </p:cNvPr>
+          <p:cNvSpPr>
+            <a:spLocks noGrp="1"/>
+          </p:cNvSpPr>
+          <p:nvPr>
+            <p:ph idx="1"/>
+          </p:nvPr>
+        </p:nvSpPr>
+        <p:spPr>
+          <a:xfrm>
+            <a:off x="677334" y="1307691"/>
+            <a:ext cx="8596668" cy="4733672"/>
+          </a:xfrm>
+        </p:spPr>
+        <p:txBody>
+          <a:bodyPr>
+            <a:normAutofit/>
+          </a:bodyPr>
+          <a:lstStyle/>
+          <a:p>
+            <a:r>
+              <a:rPr lang="en-US" dirty="0" err="1">
+                <a:latin typeface="Times New Roman" panose="02020603050405020304" pitchFamily="18" charset="0"/>
+                <a:cs typeface="Times New Roman" panose="02020603050405020304" pitchFamily="18" charset="0"/>
+              </a:rPr>
+              <a:t>FinSight</a:t>
+            </a:r>
+            <a:r>
+              <a:rPr lang="en-US" dirty="0">
+                <a:latin typeface="Times New Roman" panose="02020603050405020304" pitchFamily="18" charset="0"/>
+                <a:cs typeface="Times New Roman" panose="02020603050405020304" pitchFamily="18" charset="0"/>
+              </a:rPr>
+              <a:t> AI presents a </a:t>
+            </a:r>
+            <a:r>
+              <a:rPr lang="en-US" b="1" dirty="0">
+                <a:latin typeface="Times New Roman" panose="02020603050405020304" pitchFamily="18" charset="0"/>
+                <a:cs typeface="Times New Roman" panose="02020603050405020304" pitchFamily="18" charset="0"/>
+              </a:rPr>
+              <a:t>web-based AI financial assistant</a:t>
+            </a:r>
+            <a:r>
+              <a:rPr lang="en-US" dirty="0">
+                <a:latin typeface="Times New Roman" panose="02020603050405020304" pitchFamily="18" charset="0"/>
+                <a:cs typeface="Times New Roman" panose="02020603050405020304" pitchFamily="18" charset="0"/>
+              </a:rPr>
+              <a:t> that simplifies stock market analysis for retail investors through a conversational interface. </a:t>
+            </a:r>
+          </a:p>
+          <a:p>
+            <a:r>
+              <a:rPr lang="en-US" dirty="0">
+                <a:latin typeface="Times New Roman" panose="02020603050405020304" pitchFamily="18" charset="0"/>
+                <a:cs typeface="Times New Roman" panose="02020603050405020304" pitchFamily="18" charset="0"/>
+              </a:rPr>
+              <a:t>The system successfully integrates </a:t>
+            </a:r>
+            <a:r>
+              <a:rPr lang="en-US" b="1" dirty="0">
+                <a:latin typeface="Times New Roman" panose="02020603050405020304" pitchFamily="18" charset="0"/>
+                <a:cs typeface="Times New Roman" panose="02020603050405020304" pitchFamily="18" charset="0"/>
+              </a:rPr>
+              <a:t>real-time market data, sentiment analysis, and LLM-based reasoning</a:t>
+            </a:r>
+            <a:r>
+              <a:rPr lang="en-US" dirty="0">
+                <a:latin typeface="Times New Roman" panose="02020603050405020304" pitchFamily="18" charset="0"/>
+                <a:cs typeface="Times New Roman" panose="02020603050405020304" pitchFamily="18" charset="0"/>
+              </a:rPr>
+              <a:t> to generate meaningful investment insights such as buy/sell signals, SIP recommendations, and IPO evaluations. </a:t>
+            </a:r>
+          </a:p>
+          <a:p>
+            <a:r>
+              <a:rPr lang="en-US" dirty="0">
+                <a:latin typeface="Times New Roman" panose="02020603050405020304" pitchFamily="18" charset="0"/>
+                <a:cs typeface="Times New Roman" panose="02020603050405020304" pitchFamily="18" charset="0"/>
+              </a:rPr>
+              <a:t>The inclusion of a </a:t>
+            </a:r>
+            <a:r>
+              <a:rPr lang="en-US" b="1" dirty="0">
+                <a:latin typeface="Times New Roman" panose="02020603050405020304" pitchFamily="18" charset="0"/>
+                <a:cs typeface="Times New Roman" panose="02020603050405020304" pitchFamily="18" charset="0"/>
+              </a:rPr>
+              <a:t>RAG framework ensures more reliable and context-aware responses</a:t>
+            </a:r>
+            <a:r>
+              <a:rPr lang="en-US" dirty="0">
+                <a:latin typeface="Times New Roman" panose="02020603050405020304" pitchFamily="18" charset="0"/>
+                <a:cs typeface="Times New Roman" panose="02020603050405020304" pitchFamily="18" charset="0"/>
+              </a:rPr>
+              <a:t>, addressing limitations of traditional AI models. </a:t>
+            </a:r>
+          </a:p>
+          <a:p>
+            <a:r>
+              <a:rPr lang="en-US" dirty="0">
+                <a:latin typeface="Times New Roman" panose="02020603050405020304" pitchFamily="18" charset="0"/>
+                <a:cs typeface="Times New Roman" panose="02020603050405020304" pitchFamily="18" charset="0"/>
+              </a:rPr>
+              <a:t>The </a:t>
+            </a:r>
+            <a:r>
+              <a:rPr lang="en-US" b="1" dirty="0">
+                <a:latin typeface="Times New Roman" panose="02020603050405020304" pitchFamily="18" charset="0"/>
+                <a:cs typeface="Times New Roman" panose="02020603050405020304" pitchFamily="18" charset="0"/>
+              </a:rPr>
+              <a:t>paper trading module</a:t>
+            </a:r>
+            <a:r>
+              <a:rPr lang="en-US" dirty="0">
+                <a:latin typeface="Times New Roman" panose="02020603050405020304" pitchFamily="18" charset="0"/>
+                <a:cs typeface="Times New Roman" panose="02020603050405020304" pitchFamily="18" charset="0"/>
+              </a:rPr>
+              <a:t> enables users to test strategies without financial risk, improving practical understanding of market behavior. </a:t>
+            </a:r>
+          </a:p>
+          <a:p>
+            <a:r>
+              <a:rPr lang="en-US" dirty="0">
+                <a:latin typeface="Times New Roman" panose="02020603050405020304" pitchFamily="18" charset="0"/>
+                <a:cs typeface="Times New Roman" panose="02020603050405020304" pitchFamily="18" charset="0"/>
+              </a:rPr>
+              <a:t>Overall, the project aims to </a:t>
+            </a:r>
+            <a:r>
+              <a:rPr lang="en-US" b="1" dirty="0">
+                <a:latin typeface="Times New Roman" panose="02020603050405020304" pitchFamily="18" charset="0"/>
+                <a:cs typeface="Times New Roman" panose="02020603050405020304" pitchFamily="18" charset="0"/>
+              </a:rPr>
+              <a:t>bridge the gap between complex financial data and user-friendly decision support</a:t>
+            </a:r>
+            <a:r>
+              <a:rPr lang="en-US" dirty="0">
+                <a:latin typeface="Times New Roman" panose="02020603050405020304" pitchFamily="18" charset="0"/>
+                <a:cs typeface="Times New Roman" panose="02020603050405020304" pitchFamily="18" charset="0"/>
+              </a:rPr>
+              <a:t>, making investment analysis more accessible. </a:t>
+            </a:r>
+          </a:p>
+          <a:p>
+            <a:pPr marL="0" indent="0">
+              <a:buNone/>
+            </a:pPr>
+            <a:endParaRPr lang="en-IN" dirty="0">
+              <a:latin typeface="Times New Roman" panose="02020603050405020304" pitchFamily="18" charset="0"/>
+              <a:cs typeface="Times New Roman" panose="02020603050405020304" pitchFamily="18" charset="0"/>
+            </a:endParaRPr>
+          </a:p>
+        </p:txBody>
+      </p:sp>
+    </p:spTree>
+    <p:extLst>
+      <p:ext uri="{BB962C8B-B14F-4D97-AF65-F5344CB8AC3E}">
+        <p14:creationId xmlns:p14="http://schemas.microsoft.com/office/powerpoint/2010/main" val="3234610416"/>
+      </p:ext>
+    </p:extLst>
+  </p:cSld>
+  <p:clrMapOvr>
+    <a:masterClrMapping/>
+  </p:clrMapOvr>
+</p:sld>
+</file>
+
+<file path=ppt/slides/slide15.xml><?xml version="1.0" encoding="utf-8"?>
+<p:sld xmlns:a="http://schemas.openxmlformats.org/drawingml/2006/main" xmlns:r="http://schemas.openxmlformats.org/officeDocument/2006/relationships" xmlns:p="http://schemas.openxmlformats.org/presentationml/2006/main">
+  <p:cSld>
+    <p:spTree>
+      <p:nvGrpSpPr>
+        <p:cNvPr id="1" name=""/>
+        <p:cNvGrpSpPr/>
+        <p:nvPr/>
+      </p:nvGrpSpPr>
+      <p:grpSpPr>
+        <a:xfrm>
+          <a:off x="0" y="0"/>
+          <a:ext cx="0" cy="0"/>
+          <a:chOff x="0" y="0"/>
+          <a:chExt cx="0" cy="0"/>
+        </a:xfrm>
+      </p:grpSpPr>
+      <p:sp>
+        <p:nvSpPr>
+          <p:cNvPr id="2" name="Title 1">
+            <a:extLst>
+              <a:ext uri="{FF2B5EF4-FFF2-40B4-BE49-F238E27FC236}">
                 <a16:creationId xmlns:a16="http://schemas.microsoft.com/office/drawing/2014/main" id="{E89F05B4-F8FD-4291-E8AB-EA92AFD551D9}"/>
               </a:ext>
             </a:extLst>
@@ -6776,7 +9679,21 @@
                 <a:latin typeface="Times New Roman" panose="02020603050405020304" pitchFamily="18" charset="0"/>
                 <a:cs typeface="Times New Roman" panose="02020603050405020304" pitchFamily="18" charset="0"/>
               </a:rPr>
-              <a:t>The goal is to democratize financial analysis for retail investors who lack access to professional advisory services — all through a simple conversational interface.</a:t>
+              <a:t>The goal is to democratize financial analysis for retail investors who lack access to professional </a:t>
+            </a:r>
+            <a:r>
+              <a:rPr lang="en-US">
+                <a:latin typeface="Times New Roman" panose="02020603050405020304" pitchFamily="18" charset="0"/>
+                <a:cs typeface="Times New Roman" panose="02020603050405020304" pitchFamily="18" charset="0"/>
+              </a:rPr>
+              <a:t>advisory services </a:t>
+            </a:r>
+            <a:r>
+              <a:rPr lang="en-US" dirty="0">
+                <a:latin typeface="Times New Roman" panose="02020603050405020304" pitchFamily="18" charset="0"/>
+                <a:cs typeface="Times New Roman" panose="02020603050405020304" pitchFamily="18" charset="0"/>
+              </a:rPr>
+              <a:t>all through a simple conversational interface.</a:t>
             </a:r>
             <a:endParaRPr lang="en-IN" dirty="0">
               <a:latin typeface="Times New Roman" panose="02020603050405020304" pitchFamily="18" charset="0"/>
@@ -8775,7 +11692,7 @@
           <p:cNvPr id="2" name="Title 1">
             <a:extLst>
               <a:ext uri="{FF2B5EF4-FFF2-40B4-BE49-F238E27FC236}">
-                <a16:creationId xmlns:a16="http://schemas.microsoft.com/office/drawing/2014/main" id="{1ACFA5D6-2268-380F-122B-DDDF1C7EEA5F}"/>
+                <a16:creationId xmlns:a16="http://schemas.microsoft.com/office/drawing/2014/main" id="{7E244A2B-7CD6-85AC-1586-5110405A2670}"/>
               </a:ext>
             </a:extLst>
           </p:cNvPr>
@@ -8796,7 +11713,7 @@
                 <a:latin typeface="Times New Roman" panose="02020603050405020304" pitchFamily="18" charset="0"/>
                 <a:cs typeface="Times New Roman" panose="02020603050405020304" pitchFamily="18" charset="0"/>
               </a:rPr>
-              <a:t>Conclusion</a:t>
+              <a:t>Technical Implementation</a:t>
             </a:r>
             <a:endParaRPr lang="en-IN" dirty="0">
               <a:latin typeface="Times New Roman" panose="02020603050405020304" pitchFamily="18" charset="0"/>
@@ -8810,7 +11727,7 @@
           <p:cNvPr id="3" name="Content Placeholder 2">
             <a:extLst>
               <a:ext uri="{FF2B5EF4-FFF2-40B4-BE49-F238E27FC236}">
-                <a16:creationId xmlns:a16="http://schemas.microsoft.com/office/drawing/2014/main" id="{7211F119-D91E-95B2-CEBB-22F0C185C5CD}"/>
+                <a16:creationId xmlns:a16="http://schemas.microsoft.com/office/drawing/2014/main" id="{9DF276C3-BB10-284B-D0EC-DFBD79F6A288}"/>
               </a:ext>
             </a:extLst>
           </p:cNvPr>
@@ -8823,8 +11740,8 @@
         </p:nvSpPr>
         <p:spPr>
           <a:xfrm>
-            <a:off x="677334" y="1307691"/>
-            <a:ext cx="8596668" cy="4733672"/>
+            <a:off x="677334" y="1463041"/>
+            <a:ext cx="10732346" cy="4578322"/>
           </a:xfrm>
         </p:spPr>
         <p:txBody>
@@ -8833,6 +11750,14 @@
           </a:bodyPr>
           <a:lstStyle/>
           <a:p>
+            <a:pPr algn="just"/>
+            <a:r>
+              <a:rPr lang="en-US" dirty="0">
+                <a:latin typeface="Times New Roman" panose="02020603050405020304" pitchFamily="18" charset="0"/>
+                <a:cs typeface="Times New Roman" panose="02020603050405020304" pitchFamily="18" charset="0"/>
+              </a:rPr>
+              <a:t>As of Review 2, the core backend infrastructure of </a:t>
+            </a:r>
             <a:r>
               <a:rPr lang="en-US" dirty="0" err="1">
                 <a:latin typeface="Times New Roman" panose="02020603050405020304" pitchFamily="18" charset="0"/>
@@ -8845,119 +11770,80 @@
                 <a:latin typeface="Times New Roman" panose="02020603050405020304" pitchFamily="18" charset="0"/>
                 <a:cs typeface="Times New Roman" panose="02020603050405020304" pitchFamily="18" charset="0"/>
               </a:rPr>
-              <a:t> AI presents a </a:t>
-            </a:r>
-            <a:r>
-              <a:rPr lang="en-US" b="1" dirty="0">
+              <a:t> AI is fully operational. The </a:t>
+            </a:r>
+            <a:r>
+              <a:rPr lang="en-US" dirty="0" err="1">
                 <a:latin typeface="Times New Roman" panose="02020603050405020304" pitchFamily="18" charset="0"/>
                 <a:cs typeface="Times New Roman" panose="02020603050405020304" pitchFamily="18" charset="0"/>
               </a:rPr>
-              <a:t>web-based AI financial assistant</a:t>
+              <a:t>FastAPI</a:t>
             </a:r>
             <a:r>
               <a:rPr lang="en-US" dirty="0">
                 <a:latin typeface="Times New Roman" panose="02020603050405020304" pitchFamily="18" charset="0"/>
                 <a:cs typeface="Times New Roman" panose="02020603050405020304" pitchFamily="18" charset="0"/>
               </a:rPr>
-              <a:t> that simplifies stock market analysis for retail investors through a conversational interface. </a:t>
-            </a:r>
-          </a:p>
-          <a:p>
+              <a:t> application server is production-ready with all six API routers registered, SQLite database initialized, and a 30-minute </a:t>
+            </a:r>
+            <a:r>
+              <a:rPr lang="en-US" dirty="0" err="1">
+                <a:latin typeface="Times New Roman" panose="02020603050405020304" pitchFamily="18" charset="0"/>
+                <a:cs typeface="Times New Roman" panose="02020603050405020304" pitchFamily="18" charset="0"/>
+              </a:rPr>
+              <a:t>APScheduler</a:t>
+            </a:r>
             <a:r>
               <a:rPr lang="en-US" dirty="0">
                 <a:latin typeface="Times New Roman" panose="02020603050405020304" pitchFamily="18" charset="0"/>
                 <a:cs typeface="Times New Roman" panose="02020603050405020304" pitchFamily="18" charset="0"/>
               </a:rPr>
-              <a:t>The system successfully integrates </a:t>
-            </a:r>
-            <a:r>
-              <a:rPr lang="en-US" b="1" dirty="0">
-                <a:latin typeface="Times New Roman" panose="02020603050405020304" pitchFamily="18" charset="0"/>
-                <a:cs typeface="Times New Roman" panose="02020603050405020304" pitchFamily="18" charset="0"/>
-              </a:rPr>
-              <a:t>real-time market data, sentiment analysis, and LLM-based reasoning</a:t>
-            </a:r>
+              <a:t> refresh cycle actively running.</a:t>
+            </a:r>
+          </a:p>
+          <a:p>
+            <a:pPr algn="just"/>
             <a:r>
               <a:rPr lang="en-US" dirty="0">
                 <a:latin typeface="Times New Roman" panose="02020603050405020304" pitchFamily="18" charset="0"/>
                 <a:cs typeface="Times New Roman" panose="02020603050405020304" pitchFamily="18" charset="0"/>
               </a:rPr>
-              <a:t> to generate meaningful investment insights such as buy/sell signals, SIP recommendations, and IPO evaluations. </a:t>
-            </a:r>
-          </a:p>
-          <a:p>
+              <a:t>The paper trading engine is 95% complete, supporting real buy/sell execution with balance validation, P&amp;L calculation, average price computation on repeated purchases, and full transaction history all backed by a live SQLite database seeded with ₹1,00,000 virtue.</a:t>
+            </a:r>
+          </a:p>
+          <a:p>
+            <a:pPr algn="just"/>
             <a:r>
               <a:rPr lang="en-US" dirty="0">
                 <a:latin typeface="Times New Roman" panose="02020603050405020304" pitchFamily="18" charset="0"/>
                 <a:cs typeface="Times New Roman" panose="02020603050405020304" pitchFamily="18" charset="0"/>
               </a:rPr>
-              <a:t>The inclusion of a </a:t>
-            </a:r>
-            <a:r>
-              <a:rPr lang="en-US" b="1" dirty="0">
-                <a:latin typeface="Times New Roman" panose="02020603050405020304" pitchFamily="18" charset="0"/>
-                <a:cs typeface="Times New Roman" panose="02020603050405020304" pitchFamily="18" charset="0"/>
-              </a:rPr>
-              <a:t>RAG framework ensures more reliable and context-aware responses</a:t>
-            </a:r>
+              <a:t>The context assembler, which bridges the agentic orchestrator and Gemini 1.5 Flash, is 80% complete with a 7-section structured prompt builder handling live market data, technical signals, sentiment scores, RAG knowledge chunks, IPO data, and portfolio context. </a:t>
+            </a:r>
+          </a:p>
+          <a:p>
+            <a:pPr algn="just"/>
             <a:r>
               <a:rPr lang="en-US" dirty="0">
                 <a:latin typeface="Times New Roman" panose="02020603050405020304" pitchFamily="18" charset="0"/>
                 <a:cs typeface="Times New Roman" panose="02020603050405020304" pitchFamily="18" charset="0"/>
               </a:rPr>
-              <a:t>, addressing limitations of traditional AI models. </a:t>
-            </a:r>
-          </a:p>
-          <a:p>
+              <a:t>The orchestrator itself implements a 5-step agentic pipeline with dual-mode support for both batch and real-time streaming responses, with all tool calls executing concurrently via </a:t>
+            </a:r>
+            <a:r>
+              <a:rPr lang="en-US" dirty="0" err="1">
+                <a:latin typeface="Times New Roman" panose="02020603050405020304" pitchFamily="18" charset="0"/>
+                <a:cs typeface="Times New Roman" panose="02020603050405020304" pitchFamily="18" charset="0"/>
+              </a:rPr>
+              <a:t>asyncio</a:t>
+            </a:r>
             <a:r>
               <a:rPr lang="en-US" dirty="0">
                 <a:latin typeface="Times New Roman" panose="02020603050405020304" pitchFamily="18" charset="0"/>
                 <a:cs typeface="Times New Roman" panose="02020603050405020304" pitchFamily="18" charset="0"/>
               </a:rPr>
-              <a:t>The </a:t>
-            </a:r>
-            <a:r>
-              <a:rPr lang="en-US" b="1" dirty="0">
-                <a:latin typeface="Times New Roman" panose="02020603050405020304" pitchFamily="18" charset="0"/>
-                <a:cs typeface="Times New Roman" panose="02020603050405020304" pitchFamily="18" charset="0"/>
-              </a:rPr>
-              <a:t>paper trading module</a:t>
-            </a:r>
-            <a:r>
-              <a:rPr lang="en-US" dirty="0">
-                <a:latin typeface="Times New Roman" panose="02020603050405020304" pitchFamily="18" charset="0"/>
-                <a:cs typeface="Times New Roman" panose="02020603050405020304" pitchFamily="18" charset="0"/>
-              </a:rPr>
-              <a:t> enables users to test strategies without financial risk, improving practical understanding of market behavior. </a:t>
-            </a:r>
-          </a:p>
-          <a:p>
-            <a:r>
-              <a:rPr lang="en-US" dirty="0">
-                <a:latin typeface="Times New Roman" panose="02020603050405020304" pitchFamily="18" charset="0"/>
-                <a:cs typeface="Times New Roman" panose="02020603050405020304" pitchFamily="18" charset="0"/>
-              </a:rPr>
-              <a:t>Overall, the project aims to </a:t>
-            </a:r>
-            <a:r>
-              <a:rPr lang="en-US" b="1" dirty="0">
-                <a:latin typeface="Times New Roman" panose="02020603050405020304" pitchFamily="18" charset="0"/>
-                <a:cs typeface="Times New Roman" panose="02020603050405020304" pitchFamily="18" charset="0"/>
-              </a:rPr>
-              <a:t>bridge the gap between complex financial data and user-friendly decision support</a:t>
-            </a:r>
-            <a:r>
-              <a:rPr lang="en-US" dirty="0">
-                <a:latin typeface="Times New Roman" panose="02020603050405020304" pitchFamily="18" charset="0"/>
-                <a:cs typeface="Times New Roman" panose="02020603050405020304" pitchFamily="18" charset="0"/>
-              </a:rPr>
-              <a:t>, making investment analysis more accessible. </a:t>
-            </a:r>
-          </a:p>
-          <a:p>
-            <a:pPr marL="0" indent="0">
-              <a:buNone/>
-            </a:pPr>
+              <a:t>.</a:t>
+            </a:r>
             <a:endParaRPr lang="en-IN" dirty="0">
               <a:latin typeface="Times New Roman" panose="02020603050405020304" pitchFamily="18" charset="0"/>
               <a:cs typeface="Times New Roman" panose="02020603050405020304" pitchFamily="18" charset="0"/>
@@ -8968,7 +11854,7 @@
     </p:spTree>
     <p:extLst>
       <p:ext uri="{BB962C8B-B14F-4D97-AF65-F5344CB8AC3E}">
-        <p14:creationId xmlns:p14="http://schemas.microsoft.com/office/powerpoint/2010/main" val="3234610416"/>
+        <p14:creationId xmlns:p14="http://schemas.microsoft.com/office/powerpoint/2010/main" val="2083931669"/>
       </p:ext>
     </p:extLst>
   </p:cSld>
